--- a/Especializacion/Proyecto I/Clases/Sesion 09 - Devolución de la ACA 1 · población, muestra e instrumentos propuestos/Presentacion.pptx
+++ b/Especializacion/Proyecto I/Clases/Sesion 09 - Devolución de la ACA 1 · población, muestra e instrumentos propuestos/Presentacion.pptx
@@ -27,6 +27,8 @@
     <p:sldId id="275" r:id="rId26"/>
     <p:sldId id="276" r:id="rId27"/>
     <p:sldId id="277" r:id="rId28"/>
+    <p:sldId id="278" r:id="rId29"/>
+    <p:sldId id="279" r:id="rId30"/>
   </p:sldIdLst>
   <p:sldSz cx="12191695" cy="6858000" type="screen4x3"/>
   <p:notesSz cx="6858000" cy="9144000"/>
@@ -8522,7 +8524,7 @@
                 </a:solidFill>
                 <a:latin typeface="Calibri"/>
               </a:rPr>
-              <a:t>TALLER · Bosquejo de instrumento (20 minutos)</a:t>
+              <a:t>TALLER · Bosquejo de instrumento</a:t>
             </a:r>
           </a:p>
         </p:txBody>
@@ -8535,8 +8537,8 @@
         </p:nvSpPr>
         <p:spPr>
           <a:xfrm>
-            <a:off x="640080" y="1691639"/>
-            <a:ext cx="10911535" cy="4617720"/>
+            <a:off x="640080" y="1280160"/>
+            <a:ext cx="10911535" cy="411480"/>
           </a:xfrm>
           <a:prstGeom prst="rect">
             <a:avLst/>
@@ -8549,6 +8551,41 @@
           </a:bodyPr>
           <a:lstStyle/>
           <a:p>
+            <a:pPr algn="ctr"/>
+            <a:r>
+              <a:rPr sz="1500" b="0" i="0">
+                <a:solidFill>
+                  <a:srgbClr val="2B2B2B"/>
+                </a:solidFill>
+                <a:latin typeface="Calibri"/>
+              </a:rPr>
+              <a:t>Por equipos, con el documento de instrumento abierto · el Docente frena cualquier intento de aplicación anticipada</a:t>
+            </a:r>
+          </a:p>
+        </p:txBody>
+      </p:sp>
+      <p:sp>
+        <p:nvSpPr>
+          <p:cNvPr id="5" name="TextBox 4"/>
+          <p:cNvSpPr txBox="1"/>
+          <p:nvPr/>
+        </p:nvSpPr>
+        <p:spPr>
+          <a:xfrm>
+            <a:off x="640080" y="2011679"/>
+            <a:ext cx="10911535" cy="4297680"/>
+          </a:xfrm>
+          <a:prstGeom prst="rect">
+            <a:avLst/>
+          </a:prstGeom>
+          <a:noFill/>
+        </p:spPr>
+        <p:txBody>
+          <a:bodyPr wrap="square" anchor="t" lIns="0" rIns="0" tIns="0" bIns="0">
+            <a:spAutoFit/>
+          </a:bodyPr>
+          <a:lstStyle/>
+          <a:p>
             <a:pPr>
               <a:spcAft>
                 <a:spcPts val="1000"/>
@@ -8570,7 +8607,7 @@
                 </a:solidFill>
                 <a:latin typeface="Calibri"/>
               </a:rPr>
-              <a:t>Consigna literal</a:t>
+              <a:t>Al final tiene:</a:t>
             </a:r>
             <a:r>
               <a:rPr sz="1600" b="0" i="0">
@@ -8579,375 +8616,7 @@
                 </a:solidFill>
                 <a:latin typeface="Calibri"/>
               </a:rPr>
-              <a:t>, con el documento de instrumento abierto:</a:t>
-            </a:r>
-          </a:p>
-          <a:p>
-            <a:pPr lvl="1">
-              <a:spcAft>
-                <a:spcPts val="600"/>
-              </a:spcAft>
-            </a:pPr>
-            <a:r>
-              <a:rPr sz="1500" b="0" i="0">
-                <a:solidFill>
-                  <a:srgbClr val="2B2B2B"/>
-                </a:solidFill>
-                <a:latin typeface="Calibri"/>
-              </a:rPr>
-              <a:t>●   </a:t>
-            </a:r>
-            <a:r>
-              <a:rPr sz="1500" b="1" i="0">
-                <a:solidFill>
-                  <a:srgbClr val="2B2B2B"/>
-                </a:solidFill>
-                <a:latin typeface="Calibri"/>
-              </a:rPr>
-              <a:t>(a)</a:t>
-            </a:r>
-            <a:r>
-              <a:rPr sz="1500" b="0" i="0">
-                <a:solidFill>
-                  <a:srgbClr val="2B2B2B"/>
-                </a:solidFill>
-                <a:latin typeface="Calibri"/>
-              </a:rPr>
-              <a:t> Escriba </a:t>
-            </a:r>
-            <a:r>
-              <a:rPr sz="1500" b="1" i="0">
-                <a:solidFill>
-                  <a:srgbClr val="2B2B2B"/>
-                </a:solidFill>
-                <a:latin typeface="Calibri"/>
-              </a:rPr>
-              <a:t>población</a:t>
-            </a:r>
-            <a:r>
-              <a:rPr sz="1500" b="0" i="0">
-                <a:solidFill>
-                  <a:srgbClr val="2B2B2B"/>
-                </a:solidFill>
-                <a:latin typeface="Calibri"/>
-              </a:rPr>
-              <a:t> y </a:t>
-            </a:r>
-            <a:r>
-              <a:rPr sz="1500" b="1" i="0">
-                <a:solidFill>
-                  <a:srgbClr val="2B2B2B"/>
-                </a:solidFill>
-                <a:latin typeface="Calibri"/>
-              </a:rPr>
-              <a:t>muestra</a:t>
-            </a:r>
-            <a:r>
-              <a:rPr sz="1500" b="0" i="0">
-                <a:solidFill>
-                  <a:srgbClr val="2B2B2B"/>
-                </a:solidFill>
-                <a:latin typeface="Calibri"/>
-              </a:rPr>
-              <a:t> delimitadas (quiénes, dónde, en qué periodo) más los criterios de </a:t>
-            </a:r>
-            <a:r>
-              <a:rPr sz="1500" b="1" i="0">
-                <a:solidFill>
-                  <a:srgbClr val="2B2B2B"/>
-                </a:solidFill>
-                <a:latin typeface="Calibri"/>
-              </a:rPr>
-              <a:t>inclusión</a:t>
-            </a:r>
-            <a:r>
-              <a:rPr sz="1500" b="0" i="0">
-                <a:solidFill>
-                  <a:srgbClr val="2B2B2B"/>
-                </a:solidFill>
-                <a:latin typeface="Calibri"/>
-              </a:rPr>
-              <a:t> y </a:t>
-            </a:r>
-            <a:r>
-              <a:rPr sz="1500" b="1" i="0">
-                <a:solidFill>
-                  <a:srgbClr val="2B2B2B"/>
-                </a:solidFill>
-                <a:latin typeface="Calibri"/>
-              </a:rPr>
-              <a:t>exclusión</a:t>
-            </a:r>
-            <a:r>
-              <a:rPr sz="1500" b="0" i="0">
-                <a:solidFill>
-                  <a:srgbClr val="2B2B2B"/>
-                </a:solidFill>
-                <a:latin typeface="Calibri"/>
-              </a:rPr>
-              <a:t>.</a:t>
-            </a:r>
-          </a:p>
-          <a:p>
-            <a:pPr lvl="1">
-              <a:spcAft>
-                <a:spcPts val="600"/>
-              </a:spcAft>
-            </a:pPr>
-            <a:r>
-              <a:rPr sz="1500" b="0" i="0">
-                <a:solidFill>
-                  <a:srgbClr val="2B2B2B"/>
-                </a:solidFill>
-                <a:latin typeface="Calibri"/>
-              </a:rPr>
-              <a:t>●   </a:t>
-            </a:r>
-            <a:r>
-              <a:rPr sz="1500" b="1" i="0">
-                <a:solidFill>
-                  <a:srgbClr val="2B2B2B"/>
-                </a:solidFill>
-                <a:latin typeface="Calibri"/>
-              </a:rPr>
-              <a:t>(b)</a:t>
-            </a:r>
-            <a:r>
-              <a:rPr sz="1500" b="0" i="0">
-                <a:solidFill>
-                  <a:srgbClr val="2B2B2B"/>
-                </a:solidFill>
-                <a:latin typeface="Calibri"/>
-              </a:rPr>
-              <a:t> Declare el </a:t>
-            </a:r>
-            <a:r>
-              <a:rPr sz="1500" b="1" i="0">
-                <a:solidFill>
-                  <a:srgbClr val="2B2B2B"/>
-                </a:solidFill>
-                <a:latin typeface="Calibri"/>
-              </a:rPr>
-              <a:t>tipo de muestreo</a:t>
-            </a:r>
-            <a:r>
-              <a:rPr sz="1500" b="0" i="0">
-                <a:solidFill>
-                  <a:srgbClr val="2B2B2B"/>
-                </a:solidFill>
-                <a:latin typeface="Calibri"/>
-              </a:rPr>
-              <a:t> propuesto y por qué es el pertinente para su enfoque.</a:t>
-            </a:r>
-          </a:p>
-          <a:p>
-            <a:pPr lvl="1">
-              <a:spcAft>
-                <a:spcPts val="600"/>
-              </a:spcAft>
-            </a:pPr>
-            <a:r>
-              <a:rPr sz="1500" b="0" i="0">
-                <a:solidFill>
-                  <a:srgbClr val="2B2B2B"/>
-                </a:solidFill>
-                <a:latin typeface="Calibri"/>
-              </a:rPr>
-              <a:t>●   </a:t>
-            </a:r>
-            <a:r>
-              <a:rPr sz="1500" b="1" i="0">
-                <a:solidFill>
-                  <a:srgbClr val="2B2B2B"/>
-                </a:solidFill>
-                <a:latin typeface="Calibri"/>
-              </a:rPr>
-              <a:t>(c)</a:t>
-            </a:r>
-            <a:r>
-              <a:rPr sz="1500" b="0" i="0">
-                <a:solidFill>
-                  <a:srgbClr val="2B2B2B"/>
-                </a:solidFill>
-                <a:latin typeface="Calibri"/>
-              </a:rPr>
-              <a:t> Bosqueje su instrumento: si es </a:t>
-            </a:r>
-            <a:r>
-              <a:rPr sz="1500" b="1" i="0">
-                <a:solidFill>
-                  <a:srgbClr val="2B2B2B"/>
-                </a:solidFill>
-                <a:latin typeface="Calibri"/>
-              </a:rPr>
-              <a:t>cuestionario</a:t>
-            </a:r>
-            <a:r>
-              <a:rPr sz="1500" b="0" i="0">
-                <a:solidFill>
-                  <a:srgbClr val="2B2B2B"/>
-                </a:solidFill>
-                <a:latin typeface="Calibri"/>
-              </a:rPr>
-              <a:t>, entre </a:t>
-            </a:r>
-            <a:r>
-              <a:rPr sz="1500" b="1" i="0">
-                <a:solidFill>
-                  <a:srgbClr val="2B2B2B"/>
-                </a:solidFill>
-                <a:latin typeface="Calibri"/>
-              </a:rPr>
-              <a:t>10 y 15 ítems</a:t>
-            </a:r>
-            <a:r>
-              <a:rPr sz="1500" b="0" i="0">
-                <a:solidFill>
-                  <a:srgbClr val="2B2B2B"/>
-                </a:solidFill>
-                <a:latin typeface="Calibri"/>
-              </a:rPr>
-              <a:t>; si es </a:t>
-            </a:r>
-            <a:r>
-              <a:rPr sz="1500" b="1" i="0">
-                <a:solidFill>
-                  <a:srgbClr val="2B2B2B"/>
-                </a:solidFill>
-                <a:latin typeface="Calibri"/>
-              </a:rPr>
-              <a:t>guía de entrevista</a:t>
-            </a:r>
-            <a:r>
-              <a:rPr sz="1500" b="0" i="0">
-                <a:solidFill>
-                  <a:srgbClr val="2B2B2B"/>
-                </a:solidFill>
-                <a:latin typeface="Calibri"/>
-              </a:rPr>
-              <a:t>, </a:t>
-            </a:r>
-            <a:r>
-              <a:rPr sz="1500" b="1" i="0">
-                <a:solidFill>
-                  <a:srgbClr val="2B2B2B"/>
-                </a:solidFill>
-                <a:latin typeface="Calibri"/>
-              </a:rPr>
-              <a:t>8 preguntas</a:t>
-            </a:r>
-            <a:r>
-              <a:rPr sz="1500" b="0" i="0">
-                <a:solidFill>
-                  <a:srgbClr val="2B2B2B"/>
-                </a:solidFill>
-                <a:latin typeface="Calibri"/>
-              </a:rPr>
-              <a:t> abiertas.</a:t>
-            </a:r>
-          </a:p>
-          <a:p>
-            <a:pPr lvl="1">
-              <a:spcAft>
-                <a:spcPts val="600"/>
-              </a:spcAft>
-            </a:pPr>
-            <a:r>
-              <a:rPr sz="1500" b="0" i="0">
-                <a:solidFill>
-                  <a:srgbClr val="2B2B2B"/>
-                </a:solidFill>
-                <a:latin typeface="Calibri"/>
-              </a:rPr>
-              <a:t>●   </a:t>
-            </a:r>
-            <a:r>
-              <a:rPr sz="1500" b="1" i="0">
-                <a:solidFill>
-                  <a:srgbClr val="2B2B2B"/>
-                </a:solidFill>
-                <a:latin typeface="Calibri"/>
-              </a:rPr>
-              <a:t>(d)</a:t>
-            </a:r>
-            <a:r>
-              <a:rPr sz="1500" b="0" i="0">
-                <a:solidFill>
-                  <a:srgbClr val="2B2B2B"/>
-                </a:solidFill>
-                <a:latin typeface="Calibri"/>
-              </a:rPr>
-              <a:t> Al lado de cada bloque, escriba </a:t>
-            </a:r>
-            <a:r>
-              <a:rPr sz="1500" b="1" i="0">
-                <a:solidFill>
-                  <a:srgbClr val="2B2B2B"/>
-                </a:solidFill>
-                <a:latin typeface="Calibri"/>
-              </a:rPr>
-              <a:t>a qué objetivo específico responde</a:t>
-            </a:r>
-            <a:r>
-              <a:rPr sz="1500" b="0" i="0">
-                <a:solidFill>
-                  <a:srgbClr val="2B2B2B"/>
-                </a:solidFill>
-                <a:latin typeface="Calibri"/>
-              </a:rPr>
-              <a:t>.</a:t>
-            </a:r>
-          </a:p>
-          <a:p>
-            <a:pPr lvl="1">
-              <a:spcAft>
-                <a:spcPts val="600"/>
-              </a:spcAft>
-            </a:pPr>
-            <a:r>
-              <a:rPr sz="1500" b="0" i="0">
-                <a:solidFill>
-                  <a:srgbClr val="2B2B2B"/>
-                </a:solidFill>
-                <a:latin typeface="Calibri"/>
-              </a:rPr>
-              <a:t>●   </a:t>
-            </a:r>
-            <a:r>
-              <a:rPr sz="1500" b="1" i="0">
-                <a:solidFill>
-                  <a:srgbClr val="2B2B2B"/>
-                </a:solidFill>
-                <a:latin typeface="Calibri"/>
-              </a:rPr>
-              <a:t>(e)</a:t>
-            </a:r>
-            <a:r>
-              <a:rPr sz="1500" b="0" i="0">
-                <a:solidFill>
-                  <a:srgbClr val="2B2B2B"/>
-                </a:solidFill>
-                <a:latin typeface="Calibri"/>
-              </a:rPr>
-              <a:t> Cierre con un párrafo de </a:t>
-            </a:r>
-            <a:r>
-              <a:rPr sz="1500" b="1" i="0">
-                <a:solidFill>
-                  <a:srgbClr val="2B2B2B"/>
-                </a:solidFill>
-                <a:latin typeface="Calibri"/>
-              </a:rPr>
-              <a:t>plan de análisis</a:t>
-            </a:r>
-            <a:r>
-              <a:rPr sz="1500" b="0" i="0">
-                <a:solidFill>
-                  <a:srgbClr val="2B2B2B"/>
-                </a:solidFill>
-                <a:latin typeface="Calibri"/>
-              </a:rPr>
-              <a:t> (mínimo tres renglones).</a:t>
+              <a:t> población y muestra delimitadas, el instrumento bosquejado y el plan de análisis.</a:t>
             </a:r>
           </a:p>
           <a:p>
@@ -8972,7 +8641,7 @@
                 </a:solidFill>
                 <a:latin typeface="Calibri"/>
               </a:rPr>
-              <a:t>Criterio de éxito verificable:</a:t>
+              <a:t>Paso 1</a:t>
             </a:r>
             <a:r>
               <a:rPr sz="1600" b="0" i="0">
@@ -8981,7 +8650,7 @@
                 </a:solidFill>
                 <a:latin typeface="Calibri"/>
               </a:rPr>
-              <a:t> </a:t>
+              <a:t> · </a:t>
             </a:r>
             <a:r>
               <a:rPr sz="1600" b="1" i="0">
@@ -8990,7 +8659,7 @@
                 </a:solidFill>
                 <a:latin typeface="Calibri"/>
               </a:rPr>
-              <a:t>ningún ítem queda sin objetivo</a:t>
+              <a:t>Población</a:t>
             </a:r>
             <a:r>
               <a:rPr sz="1600" b="0" i="0">
@@ -9008,7 +8677,7 @@
                 </a:solidFill>
                 <a:latin typeface="Calibri"/>
               </a:rPr>
-              <a:t>ningún objetivo queda sin ítems</a:t>
+              <a:t>muestra</a:t>
             </a:r>
             <a:r>
               <a:rPr sz="1600" b="0" i="0">
@@ -9017,7 +8686,43 @@
                 </a:solidFill>
                 <a:latin typeface="Calibri"/>
               </a:rPr>
-              <a:t>; todo el texto está en condicional.</a:t>
+              <a:t> delimitadas —quiénes, dónde, en qué periodo— más los criterios de </a:t>
+            </a:r>
+            <a:r>
+              <a:rPr sz="1600" b="1" i="0">
+                <a:solidFill>
+                  <a:srgbClr val="2B2B2B"/>
+                </a:solidFill>
+                <a:latin typeface="Calibri"/>
+              </a:rPr>
+              <a:t>inclusión</a:t>
+            </a:r>
+            <a:r>
+              <a:rPr sz="1600" b="0" i="0">
+                <a:solidFill>
+                  <a:srgbClr val="2B2B2B"/>
+                </a:solidFill>
+                <a:latin typeface="Calibri"/>
+              </a:rPr>
+              <a:t> y </a:t>
+            </a:r>
+            <a:r>
+              <a:rPr sz="1600" b="1" i="0">
+                <a:solidFill>
+                  <a:srgbClr val="2B2B2B"/>
+                </a:solidFill>
+                <a:latin typeface="Calibri"/>
+              </a:rPr>
+              <a:t>exclusión</a:t>
+            </a:r>
+            <a:r>
+              <a:rPr sz="1600" b="0" i="0">
+                <a:solidFill>
+                  <a:srgbClr val="2B2B2B"/>
+                </a:solidFill>
+                <a:latin typeface="Calibri"/>
+              </a:rPr>
+              <a:t>.</a:t>
             </a:r>
           </a:p>
           <a:p>
@@ -9033,7 +8738,43 @@
                 </a:solidFill>
                 <a:latin typeface="Calibri"/>
               </a:rPr>
-              <a:t>–   El Docente circula por los equipos y frena cualquier intento de aplicación anticipada.</a:t>
+              <a:t>–   </a:t>
+            </a:r>
+            <a:r>
+              <a:rPr sz="1600" b="1" i="0">
+                <a:solidFill>
+                  <a:srgbClr val="2B2B2B"/>
+                </a:solidFill>
+                <a:latin typeface="Calibri"/>
+              </a:rPr>
+              <a:t>Paso 2</a:t>
+            </a:r>
+            <a:r>
+              <a:rPr sz="1600" b="0" i="0">
+                <a:solidFill>
+                  <a:srgbClr val="2B2B2B"/>
+                </a:solidFill>
+                <a:latin typeface="Calibri"/>
+              </a:rPr>
+              <a:t> · Declare el </a:t>
+            </a:r>
+            <a:r>
+              <a:rPr sz="1600" b="1" i="0">
+                <a:solidFill>
+                  <a:srgbClr val="2B2B2B"/>
+                </a:solidFill>
+                <a:latin typeface="Calibri"/>
+              </a:rPr>
+              <a:t>tipo de muestreo</a:t>
+            </a:r>
+            <a:r>
+              <a:rPr sz="1600" b="0" i="0">
+                <a:solidFill>
+                  <a:srgbClr val="2B2B2B"/>
+                </a:solidFill>
+                <a:latin typeface="Calibri"/>
+              </a:rPr>
+              <a:t> propuesto y por qué es el pertinente para su enfoque.</a:t>
             </a:r>
           </a:p>
           <a:p>
@@ -9058,7 +8799,7 @@
                 </a:solidFill>
                 <a:latin typeface="Calibri"/>
               </a:rPr>
-              <a:t>Entrega:</a:t>
+              <a:t>Paso 3</a:t>
             </a:r>
             <a:r>
               <a:rPr sz="1600" b="0" i="0">
@@ -9067,14 +8808,242 @@
                 </a:solidFill>
                 <a:latin typeface="Calibri"/>
               </a:rPr>
-              <a:t> suba el archivo como `S09_InstrumentosPropuestos_Apellidos` en [URL CDigital — campus del curso pendiente].</a:t>
-            </a:r>
-          </a:p>
-        </p:txBody>
-      </p:sp>
-      <p:sp>
-        <p:nvSpPr>
-          <p:cNvPr id="5" name="TextBox 4"/>
+              <a:t> · Bosqueje su instrumento: si es </a:t>
+            </a:r>
+            <a:r>
+              <a:rPr sz="1600" b="1" i="0">
+                <a:solidFill>
+                  <a:srgbClr val="2B2B2B"/>
+                </a:solidFill>
+                <a:latin typeface="Calibri"/>
+              </a:rPr>
+              <a:t>cuestionario</a:t>
+            </a:r>
+            <a:r>
+              <a:rPr sz="1600" b="0" i="0">
+                <a:solidFill>
+                  <a:srgbClr val="2B2B2B"/>
+                </a:solidFill>
+                <a:latin typeface="Calibri"/>
+              </a:rPr>
+              <a:t>, entre </a:t>
+            </a:r>
+            <a:r>
+              <a:rPr sz="1600" b="1" i="0">
+                <a:solidFill>
+                  <a:srgbClr val="2B2B2B"/>
+                </a:solidFill>
+                <a:latin typeface="Calibri"/>
+              </a:rPr>
+              <a:t>10 y 15 ítems</a:t>
+            </a:r>
+            <a:r>
+              <a:rPr sz="1600" b="0" i="0">
+                <a:solidFill>
+                  <a:srgbClr val="2B2B2B"/>
+                </a:solidFill>
+                <a:latin typeface="Calibri"/>
+              </a:rPr>
+              <a:t>; si es </a:t>
+            </a:r>
+            <a:r>
+              <a:rPr sz="1600" b="1" i="0">
+                <a:solidFill>
+                  <a:srgbClr val="2B2B2B"/>
+                </a:solidFill>
+                <a:latin typeface="Calibri"/>
+              </a:rPr>
+              <a:t>guía de entrevista</a:t>
+            </a:r>
+            <a:r>
+              <a:rPr sz="1600" b="0" i="0">
+                <a:solidFill>
+                  <a:srgbClr val="2B2B2B"/>
+                </a:solidFill>
+                <a:latin typeface="Calibri"/>
+              </a:rPr>
+              <a:t>, </a:t>
+            </a:r>
+            <a:r>
+              <a:rPr sz="1600" b="1" i="0">
+                <a:solidFill>
+                  <a:srgbClr val="2B2B2B"/>
+                </a:solidFill>
+                <a:latin typeface="Calibri"/>
+              </a:rPr>
+              <a:t>8 preguntas</a:t>
+            </a:r>
+            <a:r>
+              <a:rPr sz="1600" b="0" i="0">
+                <a:solidFill>
+                  <a:srgbClr val="2B2B2B"/>
+                </a:solidFill>
+                <a:latin typeface="Calibri"/>
+              </a:rPr>
+              <a:t> abiertas.</a:t>
+            </a:r>
+          </a:p>
+          <a:p>
+            <a:pPr>
+              <a:spcAft>
+                <a:spcPts val="1000"/>
+              </a:spcAft>
+            </a:pPr>
+            <a:r>
+              <a:rPr sz="1600" b="0" i="0">
+                <a:solidFill>
+                  <a:srgbClr val="2B2B2B"/>
+                </a:solidFill>
+                <a:latin typeface="Calibri"/>
+              </a:rPr>
+              <a:t>–   </a:t>
+            </a:r>
+            <a:r>
+              <a:rPr sz="1600" b="1" i="0">
+                <a:solidFill>
+                  <a:srgbClr val="2B2B2B"/>
+                </a:solidFill>
+                <a:latin typeface="Calibri"/>
+              </a:rPr>
+              <a:t>Paso 4</a:t>
+            </a:r>
+            <a:r>
+              <a:rPr sz="1600" b="0" i="0">
+                <a:solidFill>
+                  <a:srgbClr val="2B2B2B"/>
+                </a:solidFill>
+                <a:latin typeface="Calibri"/>
+              </a:rPr>
+              <a:t> · Al lado de cada bloque, escriba </a:t>
+            </a:r>
+            <a:r>
+              <a:rPr sz="1600" b="1" i="0">
+                <a:solidFill>
+                  <a:srgbClr val="2B2B2B"/>
+                </a:solidFill>
+                <a:latin typeface="Calibri"/>
+              </a:rPr>
+              <a:t>a qué objetivo específico responde</a:t>
+            </a:r>
+            <a:r>
+              <a:rPr sz="1600" b="0" i="0">
+                <a:solidFill>
+                  <a:srgbClr val="2B2B2B"/>
+                </a:solidFill>
+                <a:latin typeface="Calibri"/>
+              </a:rPr>
+              <a:t>.</a:t>
+            </a:r>
+          </a:p>
+          <a:p>
+            <a:pPr>
+              <a:spcAft>
+                <a:spcPts val="1000"/>
+              </a:spcAft>
+            </a:pPr>
+            <a:r>
+              <a:rPr sz="1600" b="0" i="0">
+                <a:solidFill>
+                  <a:srgbClr val="2B2B2B"/>
+                </a:solidFill>
+                <a:latin typeface="Calibri"/>
+              </a:rPr>
+              <a:t>–   </a:t>
+            </a:r>
+            <a:r>
+              <a:rPr sz="1600" b="1" i="0">
+                <a:solidFill>
+                  <a:srgbClr val="2B2B2B"/>
+                </a:solidFill>
+                <a:latin typeface="Calibri"/>
+              </a:rPr>
+              <a:t>Paso 5</a:t>
+            </a:r>
+            <a:r>
+              <a:rPr sz="1600" b="0" i="0">
+                <a:solidFill>
+                  <a:srgbClr val="2B2B2B"/>
+                </a:solidFill>
+                <a:latin typeface="Calibri"/>
+              </a:rPr>
+              <a:t> · Cierre con un párrafo de </a:t>
+            </a:r>
+            <a:r>
+              <a:rPr sz="1600" b="1" i="0">
+                <a:solidFill>
+                  <a:srgbClr val="2B2B2B"/>
+                </a:solidFill>
+                <a:latin typeface="Calibri"/>
+              </a:rPr>
+              <a:t>plan de análisis</a:t>
+            </a:r>
+            <a:r>
+              <a:rPr sz="1600" b="0" i="0">
+                <a:solidFill>
+                  <a:srgbClr val="2B2B2B"/>
+                </a:solidFill>
+                <a:latin typeface="Calibri"/>
+              </a:rPr>
+              <a:t>, mínimo tres renglones.</a:t>
+            </a:r>
+          </a:p>
+          <a:p>
+            <a:pPr>
+              <a:spcAft>
+                <a:spcPts val="1000"/>
+              </a:spcAft>
+            </a:pPr>
+            <a:r>
+              <a:rPr sz="1600" b="0" i="0">
+                <a:solidFill>
+                  <a:srgbClr val="2B2B2B"/>
+                </a:solidFill>
+                <a:latin typeface="Calibri"/>
+              </a:rPr>
+              <a:t>–   </a:t>
+            </a:r>
+            <a:r>
+              <a:rPr sz="1600" b="1" i="0">
+                <a:solidFill>
+                  <a:srgbClr val="2B2B2B"/>
+                </a:solidFill>
+                <a:latin typeface="Calibri"/>
+              </a:rPr>
+              <a:t>En clase, sin falta:</a:t>
+            </a:r>
+            <a:r>
+              <a:rPr sz="1600" b="0" i="0">
+                <a:solidFill>
+                  <a:srgbClr val="2B2B2B"/>
+                </a:solidFill>
+                <a:latin typeface="Calibri"/>
+              </a:rPr>
+              <a:t> los </a:t>
+            </a:r>
+            <a:r>
+              <a:rPr sz="1600" b="1" i="0">
+                <a:solidFill>
+                  <a:srgbClr val="2B2B2B"/>
+                </a:solidFill>
+                <a:latin typeface="Calibri"/>
+              </a:rPr>
+              <a:t>pasos 1 a 3</a:t>
+            </a:r>
+            <a:r>
+              <a:rPr sz="1600" b="0" i="0">
+                <a:solidFill>
+                  <a:srgbClr val="2B2B2B"/>
+                </a:solidFill>
+                <a:latin typeface="Calibri"/>
+              </a:rPr>
+              <a:t>. Del 4 en adelante puede quedar en trabajo autónomo, pero antes de la próxima sesión.</a:t>
+            </a:r>
+          </a:p>
+        </p:txBody>
+      </p:sp>
+      <p:sp>
+        <p:nvSpPr>
+          <p:cNvPr id="6" name="TextBox 5"/>
           <p:cNvSpPr txBox="1"/>
           <p:nvPr/>
         </p:nvSpPr>
@@ -9712,7 +9681,7 @@
                 </a:solidFill>
                 <a:latin typeface="Calibri"/>
               </a:rPr>
-              <a:t>Checklist de autoevaluación antes de entregar</a:t>
+              <a:t>TALLER · cómo se revisa y dónde se entrega</a:t>
             </a:r>
           </a:p>
         </p:txBody>
@@ -9725,8 +9694,8 @@
         </p:nvSpPr>
         <p:spPr>
           <a:xfrm>
-            <a:off x="640080" y="1691639"/>
-            <a:ext cx="10911535" cy="4617720"/>
+            <a:off x="640080" y="1280160"/>
+            <a:ext cx="10911535" cy="411480"/>
           </a:xfrm>
           <a:prstGeom prst="rect">
             <a:avLst/>
@@ -9739,6 +9708,41 @@
           </a:bodyPr>
           <a:lstStyle/>
           <a:p>
+            <a:pPr algn="ctr"/>
+            <a:r>
+              <a:rPr sz="1500" b="0" i="0">
+                <a:solidFill>
+                  <a:srgbClr val="2B2B2B"/>
+                </a:solidFill>
+                <a:latin typeface="Calibri"/>
+              </a:rPr>
+              <a:t>Bosquejo de instrumento</a:t>
+            </a:r>
+          </a:p>
+        </p:txBody>
+      </p:sp>
+      <p:sp>
+        <p:nvSpPr>
+          <p:cNvPr id="5" name="TextBox 4"/>
+          <p:cNvSpPr txBox="1"/>
+          <p:nvPr/>
+        </p:nvSpPr>
+        <p:spPr>
+          <a:xfrm>
+            <a:off x="640080" y="2011679"/>
+            <a:ext cx="10911535" cy="4297680"/>
+          </a:xfrm>
+          <a:prstGeom prst="rect">
+            <a:avLst/>
+          </a:prstGeom>
+          <a:noFill/>
+        </p:spPr>
+        <p:txBody>
+          <a:bodyPr wrap="square" anchor="t" lIns="0" rIns="0" tIns="0" bIns="0">
+            <a:spAutoFit/>
+          </a:bodyPr>
+          <a:lstStyle/>
+          <a:p>
             <a:pPr>
               <a:spcAft>
                 <a:spcPts val="1000"/>
@@ -9751,7 +9755,7 @@
                 </a:solidFill>
                 <a:latin typeface="Calibri"/>
               </a:rPr>
-              <a:t>–   Mi </a:t>
+              <a:t>–   </a:t>
             </a:r>
             <a:r>
               <a:rPr sz="1600" b="1" i="0">
@@ -9760,7 +9764,7 @@
                 </a:solidFill>
                 <a:latin typeface="Calibri"/>
               </a:rPr>
-              <a:t>unidad de análisis</a:t>
+              <a:t>Quedó bien si</a:t>
             </a:r>
             <a:r>
               <a:rPr sz="1600" b="0" i="0">
@@ -9769,7 +9773,91 @@
                 </a:solidFill>
                 <a:latin typeface="Calibri"/>
               </a:rPr>
-              <a:t> está nombrada explícitamente (persona, registro, documento o evento).</a:t>
+              <a:t> —compruébelo usted antes de cerrar el documento—:</a:t>
+            </a:r>
+          </a:p>
+          <a:p>
+            <a:pPr lvl="1">
+              <a:spcAft>
+                <a:spcPts val="600"/>
+              </a:spcAft>
+            </a:pPr>
+            <a:r>
+              <a:rPr sz="1500" b="0" i="0">
+                <a:solidFill>
+                  <a:srgbClr val="2B2B2B"/>
+                </a:solidFill>
+                <a:latin typeface="Calibri"/>
+              </a:rPr>
+              <a:t>●   </a:t>
+            </a:r>
+            <a:r>
+              <a:rPr sz="1500" b="1" i="0">
+                <a:solidFill>
+                  <a:srgbClr val="2B2B2B"/>
+                </a:solidFill>
+                <a:latin typeface="Calibri"/>
+              </a:rPr>
+              <a:t>Ningún ítem queda sin objetivo.</a:t>
+            </a:r>
+          </a:p>
+          <a:p>
+            <a:pPr lvl="1">
+              <a:spcAft>
+                <a:spcPts val="600"/>
+              </a:spcAft>
+            </a:pPr>
+            <a:r>
+              <a:rPr sz="1500" b="0" i="0">
+                <a:solidFill>
+                  <a:srgbClr val="2B2B2B"/>
+                </a:solidFill>
+                <a:latin typeface="Calibri"/>
+              </a:rPr>
+              <a:t>●   </a:t>
+            </a:r>
+            <a:r>
+              <a:rPr sz="1500" b="1" i="0">
+                <a:solidFill>
+                  <a:srgbClr val="2B2B2B"/>
+                </a:solidFill>
+                <a:latin typeface="Calibri"/>
+              </a:rPr>
+              <a:t>Ningún objetivo queda sin ítems.</a:t>
+            </a:r>
+          </a:p>
+          <a:p>
+            <a:pPr lvl="1">
+              <a:spcAft>
+                <a:spcPts val="600"/>
+              </a:spcAft>
+            </a:pPr>
+            <a:r>
+              <a:rPr sz="1500" b="0" i="0">
+                <a:solidFill>
+                  <a:srgbClr val="2B2B2B"/>
+                </a:solidFill>
+                <a:latin typeface="Calibri"/>
+              </a:rPr>
+              <a:t>●   Todo el texto está </a:t>
+            </a:r>
+            <a:r>
+              <a:rPr sz="1500" b="1" i="0">
+                <a:solidFill>
+                  <a:srgbClr val="2B2B2B"/>
+                </a:solidFill>
+                <a:latin typeface="Calibri"/>
+              </a:rPr>
+              <a:t>en condicional</a:t>
+            </a:r>
+            <a:r>
+              <a:rPr sz="1500" b="0" i="0">
+                <a:solidFill>
+                  <a:srgbClr val="2B2B2B"/>
+                </a:solidFill>
+                <a:latin typeface="Calibri"/>
+              </a:rPr>
+              <a:t>: en Proyecto I los instrumentos se proponen, no se aplican.</a:t>
             </a:r>
           </a:p>
           <a:p>
@@ -9794,7 +9882,7 @@
                 </a:solidFill>
                 <a:latin typeface="Calibri"/>
               </a:rPr>
-              <a:t>Población</a:t>
+              <a:t>Plan B:</a:t>
             </a:r>
             <a:r>
               <a:rPr sz="1600" b="0" i="0">
@@ -9803,25 +9891,7 @@
                 </a:solidFill>
                 <a:latin typeface="Calibri"/>
               </a:rPr>
-              <a:t> y </a:t>
-            </a:r>
-            <a:r>
-              <a:rPr sz="1600" b="1" i="0">
-                <a:solidFill>
-                  <a:srgbClr val="2B2B2B"/>
-                </a:solidFill>
-                <a:latin typeface="Calibri"/>
-              </a:rPr>
-              <a:t>muestra</a:t>
-            </a:r>
-            <a:r>
-              <a:rPr sz="1600" b="0" i="0">
-                <a:solidFill>
-                  <a:srgbClr val="2B2B2B"/>
-                </a:solidFill>
-                <a:latin typeface="Calibri"/>
-              </a:rPr>
-              <a:t> están delimitadas por lugar y periodo, y no se confunden entre sí.</a:t>
+              <a:t> Si no sabe cuántos ítems poner, empiece por los objetivos: dos o tres ítems por objetivo específico y ya tiene el bosquejo.</a:t>
             </a:r>
           </a:p>
           <a:p>
@@ -9837,7 +9907,7 @@
                 </a:solidFill>
                 <a:latin typeface="Calibri"/>
               </a:rPr>
-              <a:t>–   Escribí criterios de </a:t>
+              <a:t>–   </a:t>
             </a:r>
             <a:r>
               <a:rPr sz="1600" b="1" i="0">
@@ -9846,7 +9916,7 @@
                 </a:solidFill>
                 <a:latin typeface="Calibri"/>
               </a:rPr>
-              <a:t>inclusión</a:t>
+              <a:t>Hoy no se sube nada al aula:</a:t>
             </a:r>
             <a:r>
               <a:rPr sz="1600" b="0" i="0">
@@ -9855,7 +9925,7 @@
                 </a:solidFill>
                 <a:latin typeface="Calibri"/>
               </a:rPr>
-              <a:t> y de </a:t>
+              <a:t> guarde `S09_InstrumentosPropuestos_Apellidos` (Google Doc o PDF) en su Drive y tráigalo a la próxima sesión. Es un </a:t>
             </a:r>
             <a:r>
               <a:rPr sz="1600" b="1" i="0">
@@ -9864,7 +9934,7 @@
                 </a:solidFill>
                 <a:latin typeface="Calibri"/>
               </a:rPr>
-              <a:t>exclusión</a:t>
+              <a:t>avance formativo</a:t>
             </a:r>
             <a:r>
               <a:rPr sz="1600" b="0" i="0">
@@ -9873,7 +9943,7 @@
                 </a:solidFill>
                 <a:latin typeface="Calibri"/>
               </a:rPr>
-              <a:t> separados, y ambos son verificables por un tercero.</a:t>
+              <a:t>, se revisa en clase.</a:t>
             </a:r>
           </a:p>
           <a:p>
@@ -9889,7 +9959,7 @@
                 </a:solidFill>
                 <a:latin typeface="Calibri"/>
               </a:rPr>
-              <a:t>–   Declaré el </a:t>
+              <a:t>–   </a:t>
             </a:r>
             <a:r>
               <a:rPr sz="1600" b="1" i="0">
@@ -9898,7 +9968,7 @@
                 </a:solidFill>
                 <a:latin typeface="Calibri"/>
               </a:rPr>
-              <a:t>tipo de muestreo</a:t>
+              <a:t>Esto alimenta:</a:t>
             </a:r>
             <a:r>
               <a:rPr sz="1600" b="0" i="0">
@@ -9907,15 +9977,17 @@
                 </a:solidFill>
                 <a:latin typeface="Calibri"/>
               </a:rPr>
-              <a:t> y, si es no probabilístico, reconocí su limitación.</a:t>
-            </a:r>
-          </a:p>
-          <a:p>
-            <a:pPr>
-              <a:spcAft>
-                <a:spcPts val="1000"/>
-              </a:spcAft>
-            </a:pPr>
+              <a:t> </a:t>
+            </a:r>
+            <a:r>
+              <a:rPr sz="1600" b="1" i="0">
+                <a:solidFill>
+                  <a:srgbClr val="2B2B2B"/>
+                </a:solidFill>
+                <a:latin typeface="Calibri"/>
+              </a:rPr>
+              <a:t>ACA FINAL</a:t>
+            </a:r>
             <a:r>
               <a:rPr sz="1600" b="0" i="0">
                 <a:solidFill>
@@ -9923,7 +9995,7 @@
                 </a:solidFill>
                 <a:latin typeface="Calibri"/>
               </a:rPr>
-              <a:t>–   El </a:t>
+              <a:t> —tarea, 42%—, el documento que </a:t>
             </a:r>
             <a:r>
               <a:rPr sz="1600" b="1" i="0">
@@ -9932,7 +10004,7 @@
                 </a:solidFill>
                 <a:latin typeface="Calibri"/>
               </a:rPr>
-              <a:t>tamaño</a:t>
+              <a:t>sí</a:t>
             </a:r>
             <a:r>
               <a:rPr sz="1600" b="0" i="0">
@@ -9941,15 +10013,17 @@
                 </a:solidFill>
                 <a:latin typeface="Calibri"/>
               </a:rPr>
-              <a:t> de la muestra tiene una justificación explícita (parámetros, saturación o cobertura).</a:t>
-            </a:r>
-          </a:p>
-          <a:p>
-            <a:pPr>
-              <a:spcAft>
-                <a:spcPts val="1000"/>
-              </a:spcAft>
-            </a:pPr>
+              <a:t> recibe </a:t>
+            </a:r>
+            <a:r>
+              <a:rPr sz="1600" b="1" i="0">
+                <a:solidFill>
+                  <a:srgbClr val="2B2B2B"/>
+                </a:solidFill>
+                <a:latin typeface="Calibri"/>
+              </a:rPr>
+              <a:t>CDigital</a:t>
+            </a:r>
             <a:r>
               <a:rPr sz="1600" b="0" i="0">
                 <a:solidFill>
@@ -9957,7 +10031,7 @@
                 </a:solidFill>
                 <a:latin typeface="Calibri"/>
               </a:rPr>
-              <a:t>–   Cada bloque del instrumento indica </a:t>
+              <a:t>; cierra en la semana de la </a:t>
             </a:r>
             <a:r>
               <a:rPr sz="1600" b="1" i="0">
@@ -9966,7 +10040,7 @@
                 </a:solidFill>
                 <a:latin typeface="Calibri"/>
               </a:rPr>
-              <a:t>a qué objetivo específico responde</a:t>
+              <a:t>Sesión 10</a:t>
             </a:r>
             <a:r>
               <a:rPr sz="1600" b="0" i="0">
@@ -9978,113 +10052,11 @@
               <a:t>.</a:t>
             </a:r>
           </a:p>
-          <a:p>
-            <a:pPr>
-              <a:spcAft>
-                <a:spcPts val="1000"/>
-              </a:spcAft>
-            </a:pPr>
-            <a:r>
-              <a:rPr sz="1600" b="0" i="0">
-                <a:solidFill>
-                  <a:srgbClr val="2B2B2B"/>
-                </a:solidFill>
-                <a:latin typeface="Calibri"/>
-              </a:rPr>
-              <a:t>–   Ningún ítem induce la respuesta ni mezcla dos preguntas en una.</a:t>
-            </a:r>
-          </a:p>
-          <a:p>
-            <a:pPr>
-              <a:spcAft>
-                <a:spcPts val="1000"/>
-              </a:spcAft>
-            </a:pPr>
-            <a:r>
-              <a:rPr sz="1600" b="0" i="0">
-                <a:solidFill>
-                  <a:srgbClr val="2B2B2B"/>
-                </a:solidFill>
-                <a:latin typeface="Calibri"/>
-              </a:rPr>
-              <a:t>–   Incluí las </a:t>
-            </a:r>
-            <a:r>
-              <a:rPr sz="1600" b="1" i="0">
-                <a:solidFill>
-                  <a:srgbClr val="2B2B2B"/>
-                </a:solidFill>
-                <a:latin typeface="Calibri"/>
-              </a:rPr>
-              <a:t>cuatro declaraciones</a:t>
-            </a:r>
-            <a:r>
-              <a:rPr sz="1600" b="0" i="0">
-                <a:solidFill>
-                  <a:srgbClr val="2B2B2B"/>
-                </a:solidFill>
-                <a:latin typeface="Calibri"/>
-              </a:rPr>
-              <a:t>: propósito, estructura, validación tentativa y plan de análisis.</a:t>
-            </a:r>
-          </a:p>
-          <a:p>
-            <a:pPr>
-              <a:spcAft>
-                <a:spcPts val="1000"/>
-              </a:spcAft>
-            </a:pPr>
-            <a:r>
-              <a:rPr sz="1600" b="0" i="0">
-                <a:solidFill>
-                  <a:srgbClr val="2B2B2B"/>
-                </a:solidFill>
-                <a:latin typeface="Calibri"/>
-              </a:rPr>
-              <a:t>–   Dejé </a:t>
-            </a:r>
-            <a:r>
-              <a:rPr sz="1600" b="1" i="0">
-                <a:solidFill>
-                  <a:srgbClr val="2B2B2B"/>
-                </a:solidFill>
-                <a:latin typeface="Calibri"/>
-              </a:rPr>
-              <a:t>escrito y explícito</a:t>
-            </a:r>
-            <a:r>
-              <a:rPr sz="1600" b="0" i="0">
-                <a:solidFill>
-                  <a:srgbClr val="2B2B2B"/>
-                </a:solidFill>
-                <a:latin typeface="Calibri"/>
-              </a:rPr>
-              <a:t> que el instrumento es una </a:t>
-            </a:r>
-            <a:r>
-              <a:rPr sz="1600" b="1" i="0">
-                <a:solidFill>
-                  <a:srgbClr val="2B2B2B"/>
-                </a:solidFill>
-                <a:latin typeface="Calibri"/>
-              </a:rPr>
-              <a:t>propuesta para Proyecto II</a:t>
-            </a:r>
-            <a:r>
-              <a:rPr sz="1600" b="0" i="0">
-                <a:solidFill>
-                  <a:srgbClr val="2B2B2B"/>
-                </a:solidFill>
-                <a:latin typeface="Calibri"/>
-              </a:rPr>
-              <a:t>, y no envié nada a nadie.</a:t>
-            </a:r>
-          </a:p>
-        </p:txBody>
-      </p:sp>
-      <p:sp>
-        <p:nvSpPr>
-          <p:cNvPr id="5" name="TextBox 4"/>
+        </p:txBody>
+      </p:sp>
+      <p:sp>
+        <p:nvSpPr>
+          <p:cNvPr id="6" name="TextBox 5"/>
           <p:cNvSpPr txBox="1"/>
           <p:nvPr/>
         </p:nvSpPr>
@@ -10217,7 +10189,7 @@
                 </a:solidFill>
                 <a:latin typeface="Calibri"/>
               </a:rPr>
-              <a:t>Trabajo autónomo y qué viene después</a:t>
+              <a:t>Checklist de autoevaluación antes de entregar</a:t>
             </a:r>
           </a:p>
         </p:txBody>
@@ -10256,7 +10228,7 @@
                 </a:solidFill>
                 <a:latin typeface="Calibri"/>
               </a:rPr>
-              <a:t>–   </a:t>
+              <a:t>–   Mi </a:t>
             </a:r>
             <a:r>
               <a:rPr sz="1600" b="1" i="0">
@@ -10265,91 +10237,16 @@
                 </a:solidFill>
                 <a:latin typeface="Calibri"/>
               </a:rPr>
-              <a:t>Autónomo de esta semana:</a:t>
-            </a:r>
-          </a:p>
-          <a:p>
-            <a:pPr lvl="1">
-              <a:spcAft>
-                <a:spcPts val="600"/>
-              </a:spcAft>
-            </a:pPr>
-            <a:r>
-              <a:rPr sz="1500" b="0" i="0">
-                <a:solidFill>
-                  <a:srgbClr val="2B2B2B"/>
-                </a:solidFill>
-                <a:latin typeface="Calibri"/>
-              </a:rPr>
-              <a:t>●   Termine los ítems que quedaron a medias y redacte el </a:t>
-            </a:r>
-            <a:r>
-              <a:rPr sz="1500" b="1" i="0">
-                <a:solidFill>
-                  <a:srgbClr val="2B2B2B"/>
-                </a:solidFill>
-                <a:latin typeface="Calibri"/>
-              </a:rPr>
-              <a:t>consentimiento informado</a:t>
-            </a:r>
-            <a:r>
-              <a:rPr sz="1500" b="0" i="0">
-                <a:solidFill>
-                  <a:srgbClr val="2B2B2B"/>
-                </a:solidFill>
-                <a:latin typeface="Calibri"/>
-              </a:rPr>
-              <a:t> propuesto.</a:t>
-            </a:r>
-          </a:p>
-          <a:p>
-            <a:pPr lvl="1">
-              <a:spcAft>
-                <a:spcPts val="600"/>
-              </a:spcAft>
-            </a:pPr>
-            <a:r>
-              <a:rPr sz="1500" b="0" i="0">
-                <a:solidFill>
-                  <a:srgbClr val="2B2B2B"/>
-                </a:solidFill>
-                <a:latin typeface="Calibri"/>
-              </a:rPr>
-              <a:t>●   Pídale a un compañero de otro equipo que lea tres ítems: si los interpreta distinto a usted, reescríbalos.</a:t>
-            </a:r>
-          </a:p>
-          <a:p>
-            <a:pPr lvl="1">
-              <a:spcAft>
-                <a:spcPts val="600"/>
-              </a:spcAft>
-            </a:pPr>
-            <a:r>
-              <a:rPr sz="1500" b="0" i="0">
-                <a:solidFill>
-                  <a:srgbClr val="2B2B2B"/>
-                </a:solidFill>
-                <a:latin typeface="Calibri"/>
-              </a:rPr>
-              <a:t>●   Deje una frase explícita al inicio de la sección: "Los instrumentos aquí presentados constituyen una </a:t>
-            </a:r>
-            <a:r>
-              <a:rPr sz="1500" b="1" i="0">
-                <a:solidFill>
-                  <a:srgbClr val="2B2B2B"/>
-                </a:solidFill>
-                <a:latin typeface="Calibri"/>
-              </a:rPr>
-              <a:t>propuesta</a:t>
-            </a:r>
-            <a:r>
-              <a:rPr sz="1500" b="0" i="0">
-                <a:solidFill>
-                  <a:srgbClr val="2B2B2B"/>
-                </a:solidFill>
-                <a:latin typeface="Calibri"/>
-              </a:rPr>
-              <a:t>; su aplicación corresponde a Proyecto II".</a:t>
+              <a:t>unidad de análisis</a:t>
+            </a:r>
+            <a:r>
+              <a:rPr sz="1600" b="0" i="0">
+                <a:solidFill>
+                  <a:srgbClr val="2B2B2B"/>
+                </a:solidFill>
+                <a:latin typeface="Calibri"/>
+              </a:rPr>
+              <a:t> está nombrada explícitamente (persona, registro, documento o evento).</a:t>
             </a:r>
           </a:p>
           <a:p>
@@ -10374,127 +10271,34 @@
                 </a:solidFill>
                 <a:latin typeface="Calibri"/>
               </a:rPr>
-              <a:t>En la próxima sesión miramos el proyecto como un sistema completo:</a:t>
-            </a:r>
-          </a:p>
-          <a:p>
-            <a:pPr lvl="1">
-              <a:spcAft>
-                <a:spcPts val="600"/>
-              </a:spcAft>
-            </a:pPr>
-            <a:r>
-              <a:rPr sz="1500" b="0" i="0">
-                <a:solidFill>
-                  <a:srgbClr val="2B2B2B"/>
-                </a:solidFill>
-                <a:latin typeface="Calibri"/>
-              </a:rPr>
-              <a:t>●   </a:t>
-            </a:r>
-            <a:r>
-              <a:rPr sz="1500" b="1" i="0">
-                <a:solidFill>
-                  <a:srgbClr val="2B2B2B"/>
-                </a:solidFill>
-                <a:latin typeface="Calibri"/>
-              </a:rPr>
-              <a:t>Cronograma</a:t>
-            </a:r>
-            <a:r>
-              <a:rPr sz="1500" b="0" i="0">
-                <a:solidFill>
-                  <a:srgbClr val="2B2B2B"/>
-                </a:solidFill>
-                <a:latin typeface="Calibri"/>
-              </a:rPr>
-              <a:t> de fases hacia Proyecto II y </a:t>
-            </a:r>
-            <a:r>
-              <a:rPr sz="1500" b="1" i="0">
-                <a:solidFill>
-                  <a:srgbClr val="2B2B2B"/>
-                </a:solidFill>
-                <a:latin typeface="Calibri"/>
-              </a:rPr>
-              <a:t>viabilidad</a:t>
-            </a:r>
-            <a:r>
-              <a:rPr sz="1500" b="0" i="0">
-                <a:solidFill>
-                  <a:srgbClr val="2B2B2B"/>
-                </a:solidFill>
-                <a:latin typeface="Calibri"/>
-              </a:rPr>
-              <a:t> real (acceso, permisos, tiempo, recursos).</a:t>
-            </a:r>
-          </a:p>
-          <a:p>
-            <a:pPr lvl="1">
-              <a:spcAft>
-                <a:spcPts val="600"/>
-              </a:spcAft>
-            </a:pPr>
-            <a:r>
-              <a:rPr sz="1500" b="0" i="0">
-                <a:solidFill>
-                  <a:srgbClr val="2B2B2B"/>
-                </a:solidFill>
-                <a:latin typeface="Calibri"/>
-              </a:rPr>
-              <a:t>●   </a:t>
-            </a:r>
-            <a:r>
-              <a:rPr sz="1500" b="1" i="0">
-                <a:solidFill>
-                  <a:srgbClr val="2B2B2B"/>
-                </a:solidFill>
-                <a:latin typeface="Calibri"/>
-              </a:rPr>
-              <a:t>Integración</a:t>
-            </a:r>
-            <a:r>
-              <a:rPr sz="1500" b="0" i="0">
-                <a:solidFill>
-                  <a:srgbClr val="2B2B2B"/>
-                </a:solidFill>
-                <a:latin typeface="Calibri"/>
-              </a:rPr>
-              <a:t> del anteproyecto: dejar de tener piezas sueltas y tener un solo documento.</a:t>
-            </a:r>
-          </a:p>
-          <a:p>
-            <a:pPr lvl="1">
-              <a:spcAft>
-                <a:spcPts val="600"/>
-              </a:spcAft>
-            </a:pPr>
-            <a:r>
-              <a:rPr sz="1500" b="0" i="0">
-                <a:solidFill>
-                  <a:srgbClr val="2B2B2B"/>
-                </a:solidFill>
-                <a:latin typeface="Calibri"/>
-              </a:rPr>
-              <a:t>●   Traiga su documento </a:t>
-            </a:r>
-            <a:r>
-              <a:rPr sz="1500" b="1" i="0">
-                <a:solidFill>
-                  <a:srgbClr val="2B2B2B"/>
-                </a:solidFill>
-                <a:latin typeface="Calibri"/>
-              </a:rPr>
-              <a:t>completo</a:t>
-            </a:r>
-            <a:r>
-              <a:rPr sz="1500" b="0" i="0">
-                <a:solidFill>
-                  <a:srgbClr val="2B2B2B"/>
-                </a:solidFill>
-                <a:latin typeface="Calibri"/>
-              </a:rPr>
-              <a:t> en un solo archivo — trabajaremos sobre él, no sobre fragmentos.</a:t>
+              <a:t>Población</a:t>
+            </a:r>
+            <a:r>
+              <a:rPr sz="1600" b="0" i="0">
+                <a:solidFill>
+                  <a:srgbClr val="2B2B2B"/>
+                </a:solidFill>
+                <a:latin typeface="Calibri"/>
+              </a:rPr>
+              <a:t> y </a:t>
+            </a:r>
+            <a:r>
+              <a:rPr sz="1600" b="1" i="0">
+                <a:solidFill>
+                  <a:srgbClr val="2B2B2B"/>
+                </a:solidFill>
+                <a:latin typeface="Calibri"/>
+              </a:rPr>
+              <a:t>muestra</a:t>
+            </a:r>
+            <a:r>
+              <a:rPr sz="1600" b="0" i="0">
+                <a:solidFill>
+                  <a:srgbClr val="2B2B2B"/>
+                </a:solidFill>
+                <a:latin typeface="Calibri"/>
+              </a:rPr>
+              <a:t> están delimitadas por lugar y periodo, y no se confunden entre sí.</a:t>
             </a:r>
           </a:p>
           <a:p>
@@ -10510,7 +10314,247 @@
                 </a:solidFill>
                 <a:latin typeface="Calibri"/>
               </a:rPr>
-              <a:t>–   Las tutorías por equipo se acuerdan durante la semana con el Docente; no hay atención sin cita previa.</a:t>
+              <a:t>–   Escribí criterios de </a:t>
+            </a:r>
+            <a:r>
+              <a:rPr sz="1600" b="1" i="0">
+                <a:solidFill>
+                  <a:srgbClr val="2B2B2B"/>
+                </a:solidFill>
+                <a:latin typeface="Calibri"/>
+              </a:rPr>
+              <a:t>inclusión</a:t>
+            </a:r>
+            <a:r>
+              <a:rPr sz="1600" b="0" i="0">
+                <a:solidFill>
+                  <a:srgbClr val="2B2B2B"/>
+                </a:solidFill>
+                <a:latin typeface="Calibri"/>
+              </a:rPr>
+              <a:t> y de </a:t>
+            </a:r>
+            <a:r>
+              <a:rPr sz="1600" b="1" i="0">
+                <a:solidFill>
+                  <a:srgbClr val="2B2B2B"/>
+                </a:solidFill>
+                <a:latin typeface="Calibri"/>
+              </a:rPr>
+              <a:t>exclusión</a:t>
+            </a:r>
+            <a:r>
+              <a:rPr sz="1600" b="0" i="0">
+                <a:solidFill>
+                  <a:srgbClr val="2B2B2B"/>
+                </a:solidFill>
+                <a:latin typeface="Calibri"/>
+              </a:rPr>
+              <a:t> separados, y ambos son verificables por un tercero.</a:t>
+            </a:r>
+          </a:p>
+          <a:p>
+            <a:pPr>
+              <a:spcAft>
+                <a:spcPts val="1000"/>
+              </a:spcAft>
+            </a:pPr>
+            <a:r>
+              <a:rPr sz="1600" b="0" i="0">
+                <a:solidFill>
+                  <a:srgbClr val="2B2B2B"/>
+                </a:solidFill>
+                <a:latin typeface="Calibri"/>
+              </a:rPr>
+              <a:t>–   Declaré el </a:t>
+            </a:r>
+            <a:r>
+              <a:rPr sz="1600" b="1" i="0">
+                <a:solidFill>
+                  <a:srgbClr val="2B2B2B"/>
+                </a:solidFill>
+                <a:latin typeface="Calibri"/>
+              </a:rPr>
+              <a:t>tipo de muestreo</a:t>
+            </a:r>
+            <a:r>
+              <a:rPr sz="1600" b="0" i="0">
+                <a:solidFill>
+                  <a:srgbClr val="2B2B2B"/>
+                </a:solidFill>
+                <a:latin typeface="Calibri"/>
+              </a:rPr>
+              <a:t> y, si es no probabilístico, reconocí su limitación.</a:t>
+            </a:r>
+          </a:p>
+          <a:p>
+            <a:pPr>
+              <a:spcAft>
+                <a:spcPts val="1000"/>
+              </a:spcAft>
+            </a:pPr>
+            <a:r>
+              <a:rPr sz="1600" b="0" i="0">
+                <a:solidFill>
+                  <a:srgbClr val="2B2B2B"/>
+                </a:solidFill>
+                <a:latin typeface="Calibri"/>
+              </a:rPr>
+              <a:t>–   El </a:t>
+            </a:r>
+            <a:r>
+              <a:rPr sz="1600" b="1" i="0">
+                <a:solidFill>
+                  <a:srgbClr val="2B2B2B"/>
+                </a:solidFill>
+                <a:latin typeface="Calibri"/>
+              </a:rPr>
+              <a:t>tamaño</a:t>
+            </a:r>
+            <a:r>
+              <a:rPr sz="1600" b="0" i="0">
+                <a:solidFill>
+                  <a:srgbClr val="2B2B2B"/>
+                </a:solidFill>
+                <a:latin typeface="Calibri"/>
+              </a:rPr>
+              <a:t> de la muestra tiene una justificación explícita (parámetros, saturación o cobertura).</a:t>
+            </a:r>
+          </a:p>
+          <a:p>
+            <a:pPr>
+              <a:spcAft>
+                <a:spcPts val="1000"/>
+              </a:spcAft>
+            </a:pPr>
+            <a:r>
+              <a:rPr sz="1600" b="0" i="0">
+                <a:solidFill>
+                  <a:srgbClr val="2B2B2B"/>
+                </a:solidFill>
+                <a:latin typeface="Calibri"/>
+              </a:rPr>
+              <a:t>–   Cada bloque del instrumento indica </a:t>
+            </a:r>
+            <a:r>
+              <a:rPr sz="1600" b="1" i="0">
+                <a:solidFill>
+                  <a:srgbClr val="2B2B2B"/>
+                </a:solidFill>
+                <a:latin typeface="Calibri"/>
+              </a:rPr>
+              <a:t>a qué objetivo específico responde</a:t>
+            </a:r>
+            <a:r>
+              <a:rPr sz="1600" b="0" i="0">
+                <a:solidFill>
+                  <a:srgbClr val="2B2B2B"/>
+                </a:solidFill>
+                <a:latin typeface="Calibri"/>
+              </a:rPr>
+              <a:t>.</a:t>
+            </a:r>
+          </a:p>
+          <a:p>
+            <a:pPr>
+              <a:spcAft>
+                <a:spcPts val="1000"/>
+              </a:spcAft>
+            </a:pPr>
+            <a:r>
+              <a:rPr sz="1600" b="0" i="0">
+                <a:solidFill>
+                  <a:srgbClr val="2B2B2B"/>
+                </a:solidFill>
+                <a:latin typeface="Calibri"/>
+              </a:rPr>
+              <a:t>–   Ningún ítem induce la respuesta ni mezcla dos preguntas en una.</a:t>
+            </a:r>
+          </a:p>
+          <a:p>
+            <a:pPr>
+              <a:spcAft>
+                <a:spcPts val="1000"/>
+              </a:spcAft>
+            </a:pPr>
+            <a:r>
+              <a:rPr sz="1600" b="0" i="0">
+                <a:solidFill>
+                  <a:srgbClr val="2B2B2B"/>
+                </a:solidFill>
+                <a:latin typeface="Calibri"/>
+              </a:rPr>
+              <a:t>–   Incluí las </a:t>
+            </a:r>
+            <a:r>
+              <a:rPr sz="1600" b="1" i="0">
+                <a:solidFill>
+                  <a:srgbClr val="2B2B2B"/>
+                </a:solidFill>
+                <a:latin typeface="Calibri"/>
+              </a:rPr>
+              <a:t>cuatro declaraciones</a:t>
+            </a:r>
+            <a:r>
+              <a:rPr sz="1600" b="0" i="0">
+                <a:solidFill>
+                  <a:srgbClr val="2B2B2B"/>
+                </a:solidFill>
+                <a:latin typeface="Calibri"/>
+              </a:rPr>
+              <a:t>: propósito, estructura, validación tentativa y plan de análisis.</a:t>
+            </a:r>
+          </a:p>
+          <a:p>
+            <a:pPr>
+              <a:spcAft>
+                <a:spcPts val="1000"/>
+              </a:spcAft>
+            </a:pPr>
+            <a:r>
+              <a:rPr sz="1600" b="0" i="0">
+                <a:solidFill>
+                  <a:srgbClr val="2B2B2B"/>
+                </a:solidFill>
+                <a:latin typeface="Calibri"/>
+              </a:rPr>
+              <a:t>–   Dejé </a:t>
+            </a:r>
+            <a:r>
+              <a:rPr sz="1600" b="1" i="0">
+                <a:solidFill>
+                  <a:srgbClr val="2B2B2B"/>
+                </a:solidFill>
+                <a:latin typeface="Calibri"/>
+              </a:rPr>
+              <a:t>escrito y explícito</a:t>
+            </a:r>
+            <a:r>
+              <a:rPr sz="1600" b="0" i="0">
+                <a:solidFill>
+                  <a:srgbClr val="2B2B2B"/>
+                </a:solidFill>
+                <a:latin typeface="Calibri"/>
+              </a:rPr>
+              <a:t> que el instrumento es una </a:t>
+            </a:r>
+            <a:r>
+              <a:rPr sz="1600" b="1" i="0">
+                <a:solidFill>
+                  <a:srgbClr val="2B2B2B"/>
+                </a:solidFill>
+                <a:latin typeface="Calibri"/>
+              </a:rPr>
+              <a:t>propuesta para Proyecto II</a:t>
+            </a:r>
+            <a:r>
+              <a:rPr sz="1600" b="0" i="0">
+                <a:solidFill>
+                  <a:srgbClr val="2B2B2B"/>
+                </a:solidFill>
+                <a:latin typeface="Calibri"/>
+              </a:rPr>
+              <a:t>, y no envié nada a nadie.</a:t>
             </a:r>
           </a:p>
         </p:txBody>
@@ -10559,6 +10603,1326 @@
 </file>
 
 <file path=ppt/slides/slide22.xml><?xml version="1.0" encoding="utf-8"?>
+<p:sld xmlns:a="http://schemas.openxmlformats.org/drawingml/2006/main" xmlns:p="http://schemas.openxmlformats.org/presentationml/2006/main" xmlns:r="http://schemas.openxmlformats.org/officeDocument/2006/relationships">
+  <p:cSld>
+    <p:bg>
+      <p:bgPr>
+        <a:solidFill>
+          <a:srgbClr val="FFFFFF"/>
+        </a:solidFill>
+        <a:effectLst/>
+      </p:bgPr>
+    </p:bg>
+    <p:spTree>
+      <p:nvGrpSpPr>
+        <p:cNvPr id="1" name=""/>
+        <p:cNvGrpSpPr/>
+        <p:nvPr/>
+      </p:nvGrpSpPr>
+      <p:grpSpPr/>
+      <p:sp>
+        <p:nvSpPr>
+          <p:cNvPr id="2" name="Rectangle 1"/>
+          <p:cNvSpPr/>
+          <p:nvPr/>
+        </p:nvSpPr>
+        <p:spPr>
+          <a:xfrm>
+            <a:off x="0" y="0"/>
+            <a:ext cx="12191695" cy="1188720"/>
+          </a:xfrm>
+          <a:prstGeom prst="rect">
+            <a:avLst/>
+          </a:prstGeom>
+          <a:solidFill>
+            <a:srgbClr val="0C2340"/>
+          </a:solidFill>
+          <a:ln>
+            <a:noFill/>
+          </a:ln>
+          <a:effectLst/>
+        </p:spPr>
+        <p:style>
+          <a:lnRef idx="1">
+            <a:schemeClr val="accent1"/>
+          </a:lnRef>
+          <a:fillRef idx="3">
+            <a:schemeClr val="accent1"/>
+          </a:fillRef>
+          <a:effectRef idx="2">
+            <a:schemeClr val="accent1"/>
+          </a:effectRef>
+          <a:fontRef idx="minor">
+            <a:schemeClr val="lt1"/>
+          </a:fontRef>
+        </p:style>
+        <p:txBody>
+          <a:bodyPr rtlCol="0" anchor="ctr"/>
+          <a:lstStyle/>
+          <a:p>
+            <a:pPr algn="ctr"/>
+          </a:p>
+        </p:txBody>
+      </p:sp>
+      <p:sp>
+        <p:nvSpPr>
+          <p:cNvPr id="3" name="TextBox 2"/>
+          <p:cNvSpPr txBox="1"/>
+          <p:nvPr/>
+        </p:nvSpPr>
+        <p:spPr>
+          <a:xfrm>
+            <a:off x="640080" y="0"/>
+            <a:ext cx="9082735" cy="1188720"/>
+          </a:xfrm>
+          <a:prstGeom prst="rect">
+            <a:avLst/>
+          </a:prstGeom>
+          <a:noFill/>
+        </p:spPr>
+        <p:txBody>
+          <a:bodyPr wrap="square" anchor="ctr" lIns="0" rIns="0" tIns="0" bIns="0">
+            <a:spAutoFit/>
+          </a:bodyPr>
+          <a:lstStyle/>
+          <a:p>
+            <a:pPr algn="ctr"/>
+            <a:r>
+              <a:rPr sz="2600" b="1" i="0">
+                <a:solidFill>
+                  <a:srgbClr val="FFFFFF"/>
+                </a:solidFill>
+                <a:latin typeface="Calibri"/>
+              </a:rPr>
+              <a:t>Trabajo autónomo y qué viene después</a:t>
+            </a:r>
+          </a:p>
+        </p:txBody>
+      </p:sp>
+      <p:sp>
+        <p:nvSpPr>
+          <p:cNvPr id="4" name="TextBox 3"/>
+          <p:cNvSpPr txBox="1"/>
+          <p:nvPr/>
+        </p:nvSpPr>
+        <p:spPr>
+          <a:xfrm>
+            <a:off x="640080" y="1691639"/>
+            <a:ext cx="10911535" cy="4617720"/>
+          </a:xfrm>
+          <a:prstGeom prst="rect">
+            <a:avLst/>
+          </a:prstGeom>
+          <a:noFill/>
+        </p:spPr>
+        <p:txBody>
+          <a:bodyPr wrap="square" anchor="t" lIns="0" rIns="0" tIns="0" bIns="0">
+            <a:spAutoFit/>
+          </a:bodyPr>
+          <a:lstStyle/>
+          <a:p>
+            <a:pPr>
+              <a:spcAft>
+                <a:spcPts val="1000"/>
+              </a:spcAft>
+            </a:pPr>
+            <a:r>
+              <a:rPr sz="1600" b="0" i="0">
+                <a:solidFill>
+                  <a:srgbClr val="2B2B2B"/>
+                </a:solidFill>
+                <a:latin typeface="Calibri"/>
+              </a:rPr>
+              <a:t>–   </a:t>
+            </a:r>
+            <a:r>
+              <a:rPr sz="1600" b="1" i="0">
+                <a:solidFill>
+                  <a:srgbClr val="2B2B2B"/>
+                </a:solidFill>
+                <a:latin typeface="Calibri"/>
+              </a:rPr>
+              <a:t>Autónomo de esta semana:</a:t>
+            </a:r>
+          </a:p>
+          <a:p>
+            <a:pPr lvl="1">
+              <a:spcAft>
+                <a:spcPts val="600"/>
+              </a:spcAft>
+            </a:pPr>
+            <a:r>
+              <a:rPr sz="1500" b="0" i="0">
+                <a:solidFill>
+                  <a:srgbClr val="2B2B2B"/>
+                </a:solidFill>
+                <a:latin typeface="Calibri"/>
+              </a:rPr>
+              <a:t>●   Termine los ítems que quedaron a medias y redacte el </a:t>
+            </a:r>
+            <a:r>
+              <a:rPr sz="1500" b="1" i="0">
+                <a:solidFill>
+                  <a:srgbClr val="2B2B2B"/>
+                </a:solidFill>
+                <a:latin typeface="Calibri"/>
+              </a:rPr>
+              <a:t>consentimiento informado</a:t>
+            </a:r>
+            <a:r>
+              <a:rPr sz="1500" b="0" i="0">
+                <a:solidFill>
+                  <a:srgbClr val="2B2B2B"/>
+                </a:solidFill>
+                <a:latin typeface="Calibri"/>
+              </a:rPr>
+              <a:t> propuesto.</a:t>
+            </a:r>
+          </a:p>
+          <a:p>
+            <a:pPr lvl="1">
+              <a:spcAft>
+                <a:spcPts val="600"/>
+              </a:spcAft>
+            </a:pPr>
+            <a:r>
+              <a:rPr sz="1500" b="0" i="0">
+                <a:solidFill>
+                  <a:srgbClr val="2B2B2B"/>
+                </a:solidFill>
+                <a:latin typeface="Calibri"/>
+              </a:rPr>
+              <a:t>●   Pídale a un compañero de otro equipo que lea tres ítems: si los interpreta distinto a usted, reescríbalos.</a:t>
+            </a:r>
+          </a:p>
+          <a:p>
+            <a:pPr lvl="1">
+              <a:spcAft>
+                <a:spcPts val="600"/>
+              </a:spcAft>
+            </a:pPr>
+            <a:r>
+              <a:rPr sz="1500" b="0" i="0">
+                <a:solidFill>
+                  <a:srgbClr val="2B2B2B"/>
+                </a:solidFill>
+                <a:latin typeface="Calibri"/>
+              </a:rPr>
+              <a:t>●   Deje una frase explícita al inicio de la sección: "Los instrumentos aquí presentados constituyen una </a:t>
+            </a:r>
+            <a:r>
+              <a:rPr sz="1500" b="1" i="0">
+                <a:solidFill>
+                  <a:srgbClr val="2B2B2B"/>
+                </a:solidFill>
+                <a:latin typeface="Calibri"/>
+              </a:rPr>
+              <a:t>propuesta</a:t>
+            </a:r>
+            <a:r>
+              <a:rPr sz="1500" b="0" i="0">
+                <a:solidFill>
+                  <a:srgbClr val="2B2B2B"/>
+                </a:solidFill>
+                <a:latin typeface="Calibri"/>
+              </a:rPr>
+              <a:t>; su aplicación corresponde a Proyecto II".</a:t>
+            </a:r>
+          </a:p>
+          <a:p>
+            <a:pPr>
+              <a:spcAft>
+                <a:spcPts val="1000"/>
+              </a:spcAft>
+            </a:pPr>
+            <a:r>
+              <a:rPr sz="1600" b="0" i="0">
+                <a:solidFill>
+                  <a:srgbClr val="2B2B2B"/>
+                </a:solidFill>
+                <a:latin typeface="Calibri"/>
+              </a:rPr>
+              <a:t>–   </a:t>
+            </a:r>
+            <a:r>
+              <a:rPr sz="1600" b="1" i="0">
+                <a:solidFill>
+                  <a:srgbClr val="2B2B2B"/>
+                </a:solidFill>
+                <a:latin typeface="Calibri"/>
+              </a:rPr>
+              <a:t>En la próxima sesión miramos el proyecto como un sistema completo:</a:t>
+            </a:r>
+          </a:p>
+          <a:p>
+            <a:pPr lvl="1">
+              <a:spcAft>
+                <a:spcPts val="600"/>
+              </a:spcAft>
+            </a:pPr>
+            <a:r>
+              <a:rPr sz="1500" b="0" i="0">
+                <a:solidFill>
+                  <a:srgbClr val="2B2B2B"/>
+                </a:solidFill>
+                <a:latin typeface="Calibri"/>
+              </a:rPr>
+              <a:t>●   </a:t>
+            </a:r>
+            <a:r>
+              <a:rPr sz="1500" b="1" i="0">
+                <a:solidFill>
+                  <a:srgbClr val="2B2B2B"/>
+                </a:solidFill>
+                <a:latin typeface="Calibri"/>
+              </a:rPr>
+              <a:t>Cronograma</a:t>
+            </a:r>
+            <a:r>
+              <a:rPr sz="1500" b="0" i="0">
+                <a:solidFill>
+                  <a:srgbClr val="2B2B2B"/>
+                </a:solidFill>
+                <a:latin typeface="Calibri"/>
+              </a:rPr>
+              <a:t> de fases hacia Proyecto II y </a:t>
+            </a:r>
+            <a:r>
+              <a:rPr sz="1500" b="1" i="0">
+                <a:solidFill>
+                  <a:srgbClr val="2B2B2B"/>
+                </a:solidFill>
+                <a:latin typeface="Calibri"/>
+              </a:rPr>
+              <a:t>viabilidad</a:t>
+            </a:r>
+            <a:r>
+              <a:rPr sz="1500" b="0" i="0">
+                <a:solidFill>
+                  <a:srgbClr val="2B2B2B"/>
+                </a:solidFill>
+                <a:latin typeface="Calibri"/>
+              </a:rPr>
+              <a:t> real (acceso, permisos, tiempo, recursos).</a:t>
+            </a:r>
+          </a:p>
+          <a:p>
+            <a:pPr lvl="1">
+              <a:spcAft>
+                <a:spcPts val="600"/>
+              </a:spcAft>
+            </a:pPr>
+            <a:r>
+              <a:rPr sz="1500" b="0" i="0">
+                <a:solidFill>
+                  <a:srgbClr val="2B2B2B"/>
+                </a:solidFill>
+                <a:latin typeface="Calibri"/>
+              </a:rPr>
+              <a:t>●   </a:t>
+            </a:r>
+            <a:r>
+              <a:rPr sz="1500" b="1" i="0">
+                <a:solidFill>
+                  <a:srgbClr val="2B2B2B"/>
+                </a:solidFill>
+                <a:latin typeface="Calibri"/>
+              </a:rPr>
+              <a:t>Integración</a:t>
+            </a:r>
+            <a:r>
+              <a:rPr sz="1500" b="0" i="0">
+                <a:solidFill>
+                  <a:srgbClr val="2B2B2B"/>
+                </a:solidFill>
+                <a:latin typeface="Calibri"/>
+              </a:rPr>
+              <a:t> del anteproyecto: dejar de tener piezas sueltas y tener un solo documento.</a:t>
+            </a:r>
+          </a:p>
+          <a:p>
+            <a:pPr lvl="1">
+              <a:spcAft>
+                <a:spcPts val="600"/>
+              </a:spcAft>
+            </a:pPr>
+            <a:r>
+              <a:rPr sz="1500" b="0" i="0">
+                <a:solidFill>
+                  <a:srgbClr val="2B2B2B"/>
+                </a:solidFill>
+                <a:latin typeface="Calibri"/>
+              </a:rPr>
+              <a:t>●   Traiga su documento </a:t>
+            </a:r>
+            <a:r>
+              <a:rPr sz="1500" b="1" i="0">
+                <a:solidFill>
+                  <a:srgbClr val="2B2B2B"/>
+                </a:solidFill>
+                <a:latin typeface="Calibri"/>
+              </a:rPr>
+              <a:t>completo</a:t>
+            </a:r>
+            <a:r>
+              <a:rPr sz="1500" b="0" i="0">
+                <a:solidFill>
+                  <a:srgbClr val="2B2B2B"/>
+                </a:solidFill>
+                <a:latin typeface="Calibri"/>
+              </a:rPr>
+              <a:t> en un solo archivo — trabajaremos sobre él, no sobre fragmentos.</a:t>
+            </a:r>
+          </a:p>
+          <a:p>
+            <a:pPr>
+              <a:spcAft>
+                <a:spcPts val="1000"/>
+              </a:spcAft>
+            </a:pPr>
+            <a:r>
+              <a:rPr sz="1600" b="0" i="0">
+                <a:solidFill>
+                  <a:srgbClr val="2B2B2B"/>
+                </a:solidFill>
+                <a:latin typeface="Calibri"/>
+              </a:rPr>
+              <a:t>–   Las tutorías por equipo se acuerdan durante la semana con el Docente; no hay atención sin cita previa.</a:t>
+            </a:r>
+          </a:p>
+        </p:txBody>
+      </p:sp>
+      <p:sp>
+        <p:nvSpPr>
+          <p:cNvPr id="5" name="TextBox 4"/>
+          <p:cNvSpPr txBox="1"/>
+          <p:nvPr/>
+        </p:nvSpPr>
+        <p:spPr>
+          <a:xfrm>
+            <a:off x="11094415" y="6446520"/>
+            <a:ext cx="548640" cy="274320"/>
+          </a:xfrm>
+          <a:prstGeom prst="rect">
+            <a:avLst/>
+          </a:prstGeom>
+          <a:noFill/>
+        </p:spPr>
+        <p:txBody>
+          <a:bodyPr wrap="square" anchor="t" lIns="0" rIns="0" tIns="0" bIns="0">
+            <a:spAutoFit/>
+          </a:bodyPr>
+          <a:lstStyle/>
+          <a:p>
+            <a:pPr algn="r"/>
+            <a:r>
+              <a:rPr sz="1000" b="1" i="0">
+                <a:solidFill>
+                  <a:srgbClr val="8F989D"/>
+                </a:solidFill>
+                <a:latin typeface="Calibri"/>
+              </a:rPr>
+              <a:t>22</a:t>
+            </a:r>
+          </a:p>
+        </p:txBody>
+      </p:sp>
+    </p:spTree>
+  </p:cSld>
+  <p:clrMapOvr>
+    <a:masterClrMapping/>
+  </p:clrMapOvr>
+</p:sld>
+</file>
+
+<file path=ppt/slides/slide23.xml><?xml version="1.0" encoding="utf-8"?>
+<p:sld xmlns:a="http://schemas.openxmlformats.org/drawingml/2006/main" xmlns:p="http://schemas.openxmlformats.org/presentationml/2006/main" xmlns:r="http://schemas.openxmlformats.org/officeDocument/2006/relationships">
+  <p:cSld>
+    <p:bg>
+      <p:bgPr>
+        <a:solidFill>
+          <a:srgbClr val="FFFFFF"/>
+        </a:solidFill>
+        <a:effectLst/>
+      </p:bgPr>
+    </p:bg>
+    <p:spTree>
+      <p:nvGrpSpPr>
+        <p:cNvPr id="1" name=""/>
+        <p:cNvGrpSpPr/>
+        <p:nvPr/>
+      </p:nvGrpSpPr>
+      <p:grpSpPr/>
+      <p:sp>
+        <p:nvSpPr>
+          <p:cNvPr id="2" name="Rectangle 1"/>
+          <p:cNvSpPr/>
+          <p:nvPr/>
+        </p:nvSpPr>
+        <p:spPr>
+          <a:xfrm>
+            <a:off x="0" y="0"/>
+            <a:ext cx="12191695" cy="1188720"/>
+          </a:xfrm>
+          <a:prstGeom prst="rect">
+            <a:avLst/>
+          </a:prstGeom>
+          <a:solidFill>
+            <a:srgbClr val="0C2340"/>
+          </a:solidFill>
+          <a:ln>
+            <a:noFill/>
+          </a:ln>
+          <a:effectLst/>
+        </p:spPr>
+        <p:style>
+          <a:lnRef idx="1">
+            <a:schemeClr val="accent1"/>
+          </a:lnRef>
+          <a:fillRef idx="3">
+            <a:schemeClr val="accent1"/>
+          </a:fillRef>
+          <a:effectRef idx="2">
+            <a:schemeClr val="accent1"/>
+          </a:effectRef>
+          <a:fontRef idx="minor">
+            <a:schemeClr val="lt1"/>
+          </a:fontRef>
+        </p:style>
+        <p:txBody>
+          <a:bodyPr rtlCol="0" anchor="ctr"/>
+          <a:lstStyle/>
+          <a:p>
+            <a:pPr algn="ctr"/>
+          </a:p>
+        </p:txBody>
+      </p:sp>
+      <p:sp>
+        <p:nvSpPr>
+          <p:cNvPr id="3" name="TextBox 2"/>
+          <p:cNvSpPr txBox="1"/>
+          <p:nvPr/>
+        </p:nvSpPr>
+        <p:spPr>
+          <a:xfrm>
+            <a:off x="640080" y="0"/>
+            <a:ext cx="9082735" cy="1188720"/>
+          </a:xfrm>
+          <a:prstGeom prst="rect">
+            <a:avLst/>
+          </a:prstGeom>
+          <a:noFill/>
+        </p:spPr>
+        <p:txBody>
+          <a:bodyPr wrap="square" anchor="ctr" lIns="0" rIns="0" tIns="0" bIns="0">
+            <a:spAutoFit/>
+          </a:bodyPr>
+          <a:lstStyle/>
+          <a:p>
+            <a:pPr algn="ctr"/>
+            <a:r>
+              <a:rPr sz="2600" b="1" i="0">
+                <a:solidFill>
+                  <a:srgbClr val="FFFFFF"/>
+                </a:solidFill>
+                <a:latin typeface="Calibri"/>
+              </a:rPr>
+              <a:t>RUTA DE ENTREGABLES DEL CURSO</a:t>
+            </a:r>
+          </a:p>
+        </p:txBody>
+      </p:sp>
+      <p:sp>
+        <p:nvSpPr>
+          <p:cNvPr id="4" name="TextBox 3"/>
+          <p:cNvSpPr txBox="1"/>
+          <p:nvPr/>
+        </p:nvSpPr>
+        <p:spPr>
+          <a:xfrm>
+            <a:off x="640080" y="1280160"/>
+            <a:ext cx="10911535" cy="411480"/>
+          </a:xfrm>
+          <a:prstGeom prst="rect">
+            <a:avLst/>
+          </a:prstGeom>
+          <a:noFill/>
+        </p:spPr>
+        <p:txBody>
+          <a:bodyPr wrap="square" anchor="t" lIns="0" rIns="0" tIns="0" bIns="0">
+            <a:spAutoFit/>
+          </a:bodyPr>
+          <a:lstStyle/>
+          <a:p>
+            <a:pPr algn="ctr"/>
+            <a:r>
+              <a:rPr sz="1500" b="0" i="0">
+                <a:solidFill>
+                  <a:srgbClr val="2B2B2B"/>
+                </a:solidFill>
+                <a:latin typeface="Calibri"/>
+              </a:rPr>
+              <a:t>Sin fechas a propósito: aquí va </a:t>
+            </a:r>
+            <a:r>
+              <a:rPr sz="1500" b="1" i="0">
+                <a:solidFill>
+                  <a:srgbClr val="2B2B2B"/>
+                </a:solidFill>
+                <a:latin typeface="Calibri"/>
+              </a:rPr>
+              <a:t>en qué punto del curso</a:t>
+            </a:r>
+            <a:r>
+              <a:rPr sz="1500" b="0" i="0">
+                <a:solidFill>
+                  <a:srgbClr val="2B2B2B"/>
+                </a:solidFill>
+                <a:latin typeface="Calibri"/>
+              </a:rPr>
+              <a:t> cierra cada ítem · la ventana exacta la fija CDigital</a:t>
+            </a:r>
+          </a:p>
+        </p:txBody>
+      </p:sp>
+      <p:graphicFrame>
+        <p:nvGraphicFramePr>
+          <p:cNvPr id="5" name="Table 4"/>
+          <p:cNvGraphicFramePr>
+            <a:graphicFrameLocks noGrp="1"/>
+          </p:cNvGraphicFramePr>
+          <p:nvPr/>
+        </p:nvGraphicFramePr>
+        <p:xfrm>
+          <a:off x="640080" y="2011679"/>
+          <a:ext cx="10911533" cy="3017520"/>
+        </p:xfrm>
+        <a:graphic>
+          <a:graphicData uri="http://schemas.openxmlformats.org/drawingml/2006/table">
+            <a:tbl>
+              <a:tblPr>
+                <a:tableStyleId>{2D5ABB26-0587-4C30-8999-92F81FD0307C}</a:tableStyleId>
+              </a:tblPr>
+              <a:tblGrid>
+                <a:gridCol w="2659113"/>
+                <a:gridCol w="2659113"/>
+                <a:gridCol w="5593307"/>
+              </a:tblGrid>
+              <a:tr h="502920">
+                <a:tc>
+                  <a:txBody>
+                    <a:bodyPr/>
+                    <a:lstStyle/>
+                    <a:p>
+                      <a:pPr algn="l"/>
+                      <a:r>
+                        <a:rPr sz="1300" b="1" i="0">
+                          <a:solidFill>
+                            <a:srgbClr val="FFFFFF"/>
+                          </a:solidFill>
+                          <a:latin typeface="Calibri"/>
+                        </a:rPr>
+                        <a:t>Cierra en la semana de…</a:t>
+                      </a:r>
+                    </a:p>
+                  </a:txBody>
+                  <a:tcPr anchor="ctr" marL="109728" marR="91440" marT="36576" marB="36576">
+                    <a:solidFill>
+                      <a:srgbClr val="0C2340"/>
+                    </a:solidFill>
+                  </a:tcPr>
+                </a:tc>
+                <a:tc>
+                  <a:txBody>
+                    <a:bodyPr/>
+                    <a:lstStyle/>
+                    <a:p>
+                      <a:pPr algn="l"/>
+                      <a:r>
+                        <a:rPr sz="1300" b="1" i="0">
+                          <a:solidFill>
+                            <a:srgbClr val="FFFFFF"/>
+                          </a:solidFill>
+                          <a:latin typeface="Calibri"/>
+                        </a:rPr>
+                        <a:t>Entregable</a:t>
+                      </a:r>
+                    </a:p>
+                  </a:txBody>
+                  <a:tcPr anchor="ctr" marL="109728" marR="91440" marT="36576" marB="36576">
+                    <a:solidFill>
+                      <a:srgbClr val="0C2340"/>
+                    </a:solidFill>
+                  </a:tcPr>
+                </a:tc>
+                <a:tc>
+                  <a:txBody>
+                    <a:bodyPr/>
+                    <a:lstStyle/>
+                    <a:p>
+                      <a:pPr algn="l"/>
+                      <a:r>
+                        <a:rPr sz="1300" b="1" i="0">
+                          <a:solidFill>
+                            <a:srgbClr val="FFFFFF"/>
+                          </a:solidFill>
+                          <a:latin typeface="Calibri"/>
+                        </a:rPr>
+                        <a:t>Qué debes tener listo</a:t>
+                      </a:r>
+                    </a:p>
+                  </a:txBody>
+                  <a:tcPr anchor="ctr" marL="109728" marR="91440" marT="36576" marB="36576">
+                    <a:solidFill>
+                      <a:srgbClr val="0C2340"/>
+                    </a:solidFill>
+                  </a:tcPr>
+                </a:tc>
+              </a:tr>
+              <a:tr h="502920">
+                <a:tc>
+                  <a:txBody>
+                    <a:bodyPr/>
+                    <a:lstStyle/>
+                    <a:p>
+                      <a:pPr algn="l"/>
+                      <a:r>
+                        <a:rPr sz="1100" b="1" i="0">
+                          <a:solidFill>
+                            <a:srgbClr val="2B2B2B"/>
+                          </a:solidFill>
+                          <a:latin typeface="Calibri"/>
+                        </a:rPr>
+                        <a:t>Sesión 02</a:t>
+                      </a:r>
+                      <a:r>
+                        <a:rPr sz="1100" b="0" i="0">
+                          <a:solidFill>
+                            <a:srgbClr val="2B2B2B"/>
+                          </a:solidFill>
+                          <a:latin typeface="Calibri"/>
+                        </a:rPr>
+                        <a:t> · ya cerró</a:t>
+                      </a:r>
+                    </a:p>
+                  </a:txBody>
+                  <a:tcPr anchor="ctr" marL="109728" marR="91440" marT="36576" marB="36576">
+                    <a:solidFill>
+                      <a:srgbClr val="FFFFFF"/>
+                    </a:solidFill>
+                  </a:tcPr>
+                </a:tc>
+                <a:tc>
+                  <a:txBody>
+                    <a:bodyPr/>
+                    <a:lstStyle/>
+                    <a:p>
+                      <a:pPr algn="l"/>
+                      <a:r>
+                        <a:rPr sz="1100" b="1" i="0">
+                          <a:solidFill>
+                            <a:srgbClr val="2B2B2B"/>
+                          </a:solidFill>
+                          <a:latin typeface="Calibri"/>
+                        </a:rPr>
+                        <a:t>Quiz</a:t>
+                      </a:r>
+                      <a:r>
+                        <a:rPr sz="1100" b="0" i="0">
+                          <a:solidFill>
+                            <a:srgbClr val="2B2B2B"/>
+                          </a:solidFill>
+                          <a:latin typeface="Calibri"/>
+                        </a:rPr>
+                        <a:t> · Cuestionario · 25%</a:t>
+                      </a:r>
+                    </a:p>
+                  </a:txBody>
+                  <a:tcPr anchor="ctr" marL="109728" marR="91440" marT="36576" marB="36576">
+                    <a:solidFill>
+                      <a:srgbClr val="FFFFFF"/>
+                    </a:solidFill>
+                  </a:tcPr>
+                </a:tc>
+                <a:tc>
+                  <a:txBody>
+                    <a:bodyPr/>
+                    <a:lstStyle/>
+                    <a:p>
+                      <a:pPr algn="l"/>
+                      <a:r>
+                        <a:rPr sz="1100" b="0" i="0">
+                          <a:solidFill>
+                            <a:srgbClr val="2B2B2B"/>
+                          </a:solidFill>
+                          <a:latin typeface="Calibri"/>
+                        </a:rPr>
+                        <a:t>Estudia </a:t>
+                      </a:r>
+                      <a:r>
+                        <a:rPr sz="1100" b="1" i="0">
+                          <a:solidFill>
+                            <a:srgbClr val="2B2B2B"/>
+                          </a:solidFill>
+                          <a:latin typeface="Calibri"/>
+                        </a:rPr>
+                        <a:t>problema y pregunta</a:t>
+                      </a:r>
+                      <a:r>
+                        <a:rPr sz="1100" b="0" i="0">
+                          <a:solidFill>
+                            <a:srgbClr val="2B2B2B"/>
+                          </a:solidFill>
+                          <a:latin typeface="Calibri"/>
+                        </a:rPr>
+                        <a:t> de investigación; resuélvelo dentro de su ventana.</a:t>
+                      </a:r>
+                    </a:p>
+                  </a:txBody>
+                  <a:tcPr anchor="ctr" marL="109728" marR="91440" marT="36576" marB="36576">
+                    <a:solidFill>
+                      <a:srgbClr val="FFFFFF"/>
+                    </a:solidFill>
+                  </a:tcPr>
+                </a:tc>
+              </a:tr>
+              <a:tr h="502920">
+                <a:tc>
+                  <a:txBody>
+                    <a:bodyPr/>
+                    <a:lstStyle/>
+                    <a:p>
+                      <a:pPr algn="l"/>
+                      <a:r>
+                        <a:rPr sz="1100" b="1" i="0">
+                          <a:solidFill>
+                            <a:srgbClr val="2B2B2B"/>
+                          </a:solidFill>
+                          <a:latin typeface="Calibri"/>
+                        </a:rPr>
+                        <a:t>Sesión 07</a:t>
+                      </a:r>
+                      <a:r>
+                        <a:rPr sz="1100" b="0" i="0">
+                          <a:solidFill>
+                            <a:srgbClr val="2B2B2B"/>
+                          </a:solidFill>
+                          <a:latin typeface="Calibri"/>
+                        </a:rPr>
+                        <a:t> · ya cerró</a:t>
+                      </a:r>
+                    </a:p>
+                  </a:txBody>
+                  <a:tcPr anchor="ctr" marL="109728" marR="91440" marT="36576" marB="36576">
+                    <a:solidFill>
+                      <a:srgbClr val="F2F2F2"/>
+                    </a:solidFill>
+                  </a:tcPr>
+                </a:tc>
+                <a:tc>
+                  <a:txBody>
+                    <a:bodyPr/>
+                    <a:lstStyle/>
+                    <a:p>
+                      <a:pPr algn="l"/>
+                      <a:r>
+                        <a:rPr sz="1100" b="1" i="0">
+                          <a:solidFill>
+                            <a:srgbClr val="2B2B2B"/>
+                          </a:solidFill>
+                          <a:latin typeface="Calibri"/>
+                        </a:rPr>
+                        <a:t>ACA 1</a:t>
+                      </a:r>
+                      <a:r>
+                        <a:rPr sz="1100" b="0" i="0">
+                          <a:solidFill>
+                            <a:srgbClr val="2B2B2B"/>
+                          </a:solidFill>
+                          <a:latin typeface="Calibri"/>
+                        </a:rPr>
+                        <a:t> · Tarea · 25%</a:t>
+                      </a:r>
+                    </a:p>
+                  </a:txBody>
+                  <a:tcPr anchor="ctr" marL="109728" marR="91440" marT="36576" marB="36576">
+                    <a:solidFill>
+                      <a:srgbClr val="F2F2F2"/>
+                    </a:solidFill>
+                  </a:tcPr>
+                </a:tc>
+                <a:tc>
+                  <a:txBody>
+                    <a:bodyPr/>
+                    <a:lstStyle/>
+                    <a:p>
+                      <a:pPr algn="l"/>
+                      <a:r>
+                        <a:rPr sz="1100" b="0" i="0">
+                          <a:solidFill>
+                            <a:srgbClr val="2B2B2B"/>
+                          </a:solidFill>
+                          <a:latin typeface="Calibri"/>
+                        </a:rPr>
+                        <a:t>Sube en </a:t>
+                      </a:r>
+                      <a:r>
+                        <a:rPr sz="1100" b="1" i="0">
+                          <a:solidFill>
+                            <a:srgbClr val="2B2B2B"/>
+                          </a:solidFill>
+                          <a:latin typeface="Calibri"/>
+                        </a:rPr>
+                        <a:t>plantilla APA</a:t>
+                      </a:r>
+                      <a:r>
+                        <a:rPr sz="1100" b="0" i="0">
+                          <a:solidFill>
+                            <a:srgbClr val="2B2B2B"/>
+                          </a:solidFill>
+                          <a:latin typeface="Calibri"/>
+                        </a:rPr>
+                        <a:t> problema, pregunta, objetivos, mínimo 6 antecedentes y los marcos.</a:t>
+                      </a:r>
+                    </a:p>
+                  </a:txBody>
+                  <a:tcPr anchor="ctr" marL="109728" marR="91440" marT="36576" marB="36576">
+                    <a:solidFill>
+                      <a:srgbClr val="F2F2F2"/>
+                    </a:solidFill>
+                  </a:tcPr>
+                </a:tc>
+              </a:tr>
+              <a:tr h="502920">
+                <a:tc>
+                  <a:txBody>
+                    <a:bodyPr/>
+                    <a:lstStyle/>
+                    <a:p>
+                      <a:pPr algn="l"/>
+                      <a:r>
+                        <a:rPr sz="1100" b="1" i="0">
+                          <a:solidFill>
+                            <a:srgbClr val="2B2B2B"/>
+                          </a:solidFill>
+                          <a:latin typeface="Calibri"/>
+                        </a:rPr>
+                        <a:t>Sesión 10</a:t>
+                      </a:r>
+                      <a:r>
+                        <a:rPr sz="1100" b="0" i="0">
+                          <a:solidFill>
+                            <a:srgbClr val="2B2B2B"/>
+                          </a:solidFill>
+                          <a:latin typeface="Calibri"/>
+                        </a:rPr>
+                        <a:t> · pendiente</a:t>
+                      </a:r>
+                    </a:p>
+                  </a:txBody>
+                  <a:tcPr anchor="ctr" marL="109728" marR="91440" marT="36576" marB="36576">
+                    <a:solidFill>
+                      <a:srgbClr val="FFFFFF"/>
+                    </a:solidFill>
+                  </a:tcPr>
+                </a:tc>
+                <a:tc>
+                  <a:txBody>
+                    <a:bodyPr/>
+                    <a:lstStyle/>
+                    <a:p>
+                      <a:pPr algn="l"/>
+                      <a:r>
+                        <a:rPr sz="1100" b="1" i="0">
+                          <a:solidFill>
+                            <a:srgbClr val="2B2B2B"/>
+                          </a:solidFill>
+                          <a:latin typeface="Calibri"/>
+                        </a:rPr>
+                        <a:t>ACA FINAL</a:t>
+                      </a:r>
+                      <a:r>
+                        <a:rPr sz="1100" b="0" i="0">
+                          <a:solidFill>
+                            <a:srgbClr val="2B2B2B"/>
+                          </a:solidFill>
+                          <a:latin typeface="Calibri"/>
+                        </a:rPr>
+                        <a:t> · Tarea · 42%</a:t>
+                      </a:r>
+                    </a:p>
+                  </a:txBody>
+                  <a:tcPr anchor="ctr" marL="109728" marR="91440" marT="36576" marB="36576">
+                    <a:solidFill>
+                      <a:srgbClr val="FFFFFF"/>
+                    </a:solidFill>
+                  </a:tcPr>
+                </a:tc>
+                <a:tc>
+                  <a:txBody>
+                    <a:bodyPr/>
+                    <a:lstStyle/>
+                    <a:p>
+                      <a:pPr algn="l"/>
+                      <a:r>
+                        <a:rPr sz="1100" b="0" i="0">
+                          <a:solidFill>
+                            <a:srgbClr val="2B2B2B"/>
+                          </a:solidFill>
+                          <a:latin typeface="Calibri"/>
+                        </a:rPr>
+                        <a:t>Sube el anteproyecto integrado con las </a:t>
+                      </a:r>
+                      <a:r>
+                        <a:rPr sz="1100" b="1" i="0">
+                          <a:solidFill>
+                            <a:srgbClr val="2B2B2B"/>
+                          </a:solidFill>
+                          <a:latin typeface="Calibri"/>
+                        </a:rPr>
+                        <a:t>correcciones</a:t>
+                      </a:r>
+                      <a:r>
+                        <a:rPr sz="1100" b="0" i="0">
+                          <a:solidFill>
+                            <a:srgbClr val="2B2B2B"/>
+                          </a:solidFill>
+                          <a:latin typeface="Calibri"/>
+                        </a:rPr>
+                        <a:t> de la ACA 1, metodología y viabilidad.</a:t>
+                      </a:r>
+                    </a:p>
+                  </a:txBody>
+                  <a:tcPr anchor="ctr" marL="109728" marR="91440" marT="36576" marB="36576">
+                    <a:solidFill>
+                      <a:srgbClr val="FFFFFF"/>
+                    </a:solidFill>
+                  </a:tcPr>
+                </a:tc>
+              </a:tr>
+              <a:tr h="502920">
+                <a:tc>
+                  <a:txBody>
+                    <a:bodyPr/>
+                    <a:lstStyle/>
+                    <a:p>
+                      <a:pPr algn="l"/>
+                      <a:r>
+                        <a:rPr sz="1100" b="1" i="0">
+                          <a:solidFill>
+                            <a:srgbClr val="2B2B2B"/>
+                          </a:solidFill>
+                          <a:latin typeface="Calibri"/>
+                        </a:rPr>
+                        <a:t>Sesión 11</a:t>
+                      </a:r>
+                      <a:r>
+                        <a:rPr sz="1100" b="0" i="0">
+                          <a:solidFill>
+                            <a:srgbClr val="2B2B2B"/>
+                          </a:solidFill>
+                          <a:latin typeface="Calibri"/>
+                        </a:rPr>
+                        <a:t> · pendiente</a:t>
+                      </a:r>
+                    </a:p>
+                  </a:txBody>
+                  <a:tcPr anchor="ctr" marL="109728" marR="91440" marT="36576" marB="36576">
+                    <a:solidFill>
+                      <a:srgbClr val="F2F2F2"/>
+                    </a:solidFill>
+                  </a:tcPr>
+                </a:tc>
+                <a:tc>
+                  <a:txBody>
+                    <a:bodyPr/>
+                    <a:lstStyle/>
+                    <a:p>
+                      <a:pPr algn="l"/>
+                      <a:r>
+                        <a:rPr sz="1100" b="1" i="0">
+                          <a:solidFill>
+                            <a:srgbClr val="2B2B2B"/>
+                          </a:solidFill>
+                          <a:latin typeface="Calibri"/>
+                        </a:rPr>
+                        <a:t>Autoevaluación</a:t>
+                      </a:r>
+                      <a:r>
+                        <a:rPr sz="1100" b="0" i="0">
+                          <a:solidFill>
+                            <a:srgbClr val="2B2B2B"/>
+                          </a:solidFill>
+                          <a:latin typeface="Calibri"/>
+                        </a:rPr>
+                        <a:t> · Cuestionario · 4%</a:t>
+                      </a:r>
+                    </a:p>
+                  </a:txBody>
+                  <a:tcPr anchor="ctr" marL="109728" marR="91440" marT="36576" marB="36576">
+                    <a:solidFill>
+                      <a:srgbClr val="F2F2F2"/>
+                    </a:solidFill>
+                  </a:tcPr>
+                </a:tc>
+                <a:tc>
+                  <a:txBody>
+                    <a:bodyPr/>
+                    <a:lstStyle/>
+                    <a:p>
+                      <a:pPr algn="l"/>
+                      <a:r>
+                        <a:rPr sz="1100" b="0" i="0">
+                          <a:solidFill>
+                            <a:srgbClr val="2B2B2B"/>
+                          </a:solidFill>
+                          <a:latin typeface="Calibri"/>
+                        </a:rPr>
+                        <a:t>Diligénciala tú, dentro de su ventana, según tu </a:t>
+                      </a:r>
+                      <a:r>
+                        <a:rPr sz="1100" b="1" i="0">
+                          <a:solidFill>
+                            <a:srgbClr val="2B2B2B"/>
+                          </a:solidFill>
+                          <a:latin typeface="Calibri"/>
+                        </a:rPr>
+                        <a:t>participación real</a:t>
+                      </a:r>
+                      <a:r>
+                        <a:rPr sz="1100" b="0" i="0">
+                          <a:solidFill>
+                            <a:srgbClr val="2B2B2B"/>
+                          </a:solidFill>
+                          <a:latin typeface="Calibri"/>
+                        </a:rPr>
+                        <a:t>.</a:t>
+                      </a:r>
+                    </a:p>
+                  </a:txBody>
+                  <a:tcPr anchor="ctr" marL="109728" marR="91440" marT="36576" marB="36576">
+                    <a:solidFill>
+                      <a:srgbClr val="F2F2F2"/>
+                    </a:solidFill>
+                  </a:tcPr>
+                </a:tc>
+              </a:tr>
+              <a:tr h="502920">
+                <a:tc>
+                  <a:txBody>
+                    <a:bodyPr/>
+                    <a:lstStyle/>
+                    <a:p>
+                      <a:pPr algn="l"/>
+                      <a:r>
+                        <a:rPr sz="1100" b="1" i="0">
+                          <a:solidFill>
+                            <a:srgbClr val="2B2B2B"/>
+                          </a:solidFill>
+                          <a:latin typeface="Calibri"/>
+                        </a:rPr>
+                        <a:t>Sesión 11</a:t>
+                      </a:r>
+                      <a:r>
+                        <a:rPr sz="1100" b="0" i="0">
+                          <a:solidFill>
+                            <a:srgbClr val="2B2B2B"/>
+                          </a:solidFill>
+                          <a:latin typeface="Calibri"/>
+                        </a:rPr>
+                        <a:t> · pendiente</a:t>
+                      </a:r>
+                    </a:p>
+                  </a:txBody>
+                  <a:tcPr anchor="ctr" marL="109728" marR="91440" marT="36576" marB="36576">
+                    <a:solidFill>
+                      <a:srgbClr val="FFFFFF"/>
+                    </a:solidFill>
+                  </a:tcPr>
+                </a:tc>
+                <a:tc>
+                  <a:txBody>
+                    <a:bodyPr/>
+                    <a:lstStyle/>
+                    <a:p>
+                      <a:pPr algn="l"/>
+                      <a:r>
+                        <a:rPr sz="1100" b="1" i="0">
+                          <a:solidFill>
+                            <a:srgbClr val="2B2B2B"/>
+                          </a:solidFill>
+                          <a:latin typeface="Calibri"/>
+                        </a:rPr>
+                        <a:t>Coevaluación</a:t>
+                      </a:r>
+                      <a:r>
+                        <a:rPr sz="1100" b="0" i="0">
+                          <a:solidFill>
+                            <a:srgbClr val="2B2B2B"/>
+                          </a:solidFill>
+                          <a:latin typeface="Calibri"/>
+                        </a:rPr>
+                        <a:t> · Foro · 4%</a:t>
+                      </a:r>
+                    </a:p>
+                  </a:txBody>
+                  <a:tcPr anchor="ctr" marL="109728" marR="91440" marT="36576" marB="36576">
+                    <a:solidFill>
+                      <a:srgbClr val="FFFFFF"/>
+                    </a:solidFill>
+                  </a:tcPr>
+                </a:tc>
+                <a:tc>
+                  <a:txBody>
+                    <a:bodyPr/>
+                    <a:lstStyle/>
+                    <a:p>
+                      <a:pPr algn="l"/>
+                      <a:r>
+                        <a:rPr sz="1100" b="1" i="0">
+                          <a:solidFill>
+                            <a:srgbClr val="2B2B2B"/>
+                          </a:solidFill>
+                          <a:latin typeface="Calibri"/>
+                        </a:rPr>
+                        <a:t>Publica</a:t>
+                      </a:r>
+                      <a:r>
+                        <a:rPr sz="1100" b="0" i="0">
+                          <a:solidFill>
+                            <a:srgbClr val="2B2B2B"/>
+                          </a:solidFill>
+                          <a:latin typeface="Calibri"/>
+                        </a:rPr>
+                        <a:t> tu propio aporte y valora hechos del trabajo del equipo, con respeto.</a:t>
+                      </a:r>
+                    </a:p>
+                  </a:txBody>
+                  <a:tcPr anchor="ctr" marL="109728" marR="91440" marT="36576" marB="36576">
+                    <a:solidFill>
+                      <a:srgbClr val="FFFFFF"/>
+                    </a:solidFill>
+                  </a:tcPr>
+                </a:tc>
+              </a:tr>
+            </a:tbl>
+          </a:graphicData>
+        </a:graphic>
+      </p:graphicFrame>
+      <p:sp>
+        <p:nvSpPr>
+          <p:cNvPr id="6" name="TextBox 5"/>
+          <p:cNvSpPr txBox="1"/>
+          <p:nvPr/>
+        </p:nvSpPr>
+        <p:spPr>
+          <a:xfrm>
+            <a:off x="640080" y="5166360"/>
+            <a:ext cx="10911535" cy="548640"/>
+          </a:xfrm>
+          <a:prstGeom prst="rect">
+            <a:avLst/>
+          </a:prstGeom>
+          <a:noFill/>
+        </p:spPr>
+        <p:txBody>
+          <a:bodyPr wrap="square" anchor="t" lIns="0" rIns="0" tIns="0" bIns="0">
+            <a:spAutoFit/>
+          </a:bodyPr>
+          <a:lstStyle/>
+          <a:p>
+            <a:r>
+              <a:rPr sz="1200" b="0" i="1">
+                <a:solidFill>
+                  <a:srgbClr val="2B2B2B"/>
+                </a:solidFill>
+                <a:latin typeface="Calibri"/>
+              </a:rPr>
+              <a:t>Esta misma tabla va al final de todas las sesiones. La </a:t>
+            </a:r>
+            <a:r>
+              <a:rPr sz="1200" b="1" i="1">
+                <a:solidFill>
+                  <a:srgbClr val="2B2B2B"/>
+                </a:solidFill>
+                <a:latin typeface="Calibri"/>
+              </a:rPr>
+              <a:t>fecha</a:t>
+            </a:r>
+            <a:r>
+              <a:rPr sz="1200" b="0" i="1">
+                <a:solidFill>
+                  <a:srgbClr val="2B2B2B"/>
+                </a:solidFill>
+                <a:latin typeface="Calibri"/>
+              </a:rPr>
+              <a:t> de cada ventana está en el enunciado del ítem (`Clases/Recursos/ACAs/`) y en el aula: si el aula y cualquier otro material se contradicen, </a:t>
+            </a:r>
+            <a:r>
+              <a:rPr sz="1200" b="1" i="1">
+                <a:solidFill>
+                  <a:srgbClr val="2B2B2B"/>
+                </a:solidFill>
+                <a:latin typeface="Calibri"/>
+              </a:rPr>
+              <a:t>manda el aula</a:t>
+            </a:r>
+            <a:r>
+              <a:rPr sz="1200" b="0" i="1">
+                <a:solidFill>
+                  <a:srgbClr val="2B2B2B"/>
+                </a:solidFill>
+                <a:latin typeface="Calibri"/>
+              </a:rPr>
+              <a:t>.</a:t>
+            </a:r>
+          </a:p>
+        </p:txBody>
+      </p:sp>
+      <p:sp>
+        <p:nvSpPr>
+          <p:cNvPr id="7" name="TextBox 6"/>
+          <p:cNvSpPr txBox="1"/>
+          <p:nvPr/>
+        </p:nvSpPr>
+        <p:spPr>
+          <a:xfrm>
+            <a:off x="11094415" y="6446520"/>
+            <a:ext cx="548640" cy="274320"/>
+          </a:xfrm>
+          <a:prstGeom prst="rect">
+            <a:avLst/>
+          </a:prstGeom>
+          <a:noFill/>
+        </p:spPr>
+        <p:txBody>
+          <a:bodyPr wrap="square" anchor="t" lIns="0" rIns="0" tIns="0" bIns="0">
+            <a:spAutoFit/>
+          </a:bodyPr>
+          <a:lstStyle/>
+          <a:p>
+            <a:pPr algn="r"/>
+            <a:r>
+              <a:rPr sz="1000" b="1" i="0">
+                <a:solidFill>
+                  <a:srgbClr val="8F989D"/>
+                </a:solidFill>
+                <a:latin typeface="Calibri"/>
+              </a:rPr>
+              <a:t>23</a:t>
+            </a:r>
+          </a:p>
+        </p:txBody>
+      </p:sp>
+    </p:spTree>
+  </p:cSld>
+  <p:clrMapOvr>
+    <a:masterClrMapping/>
+  </p:clrMapOvr>
+</p:sld>
+</file>
+
+<file path=ppt/slides/slide24.xml><?xml version="1.0" encoding="utf-8"?>
 <p:sld xmlns:a="http://schemas.openxmlformats.org/drawingml/2006/main" xmlns:p="http://schemas.openxmlformats.org/presentationml/2006/main" xmlns:r="http://schemas.openxmlformats.org/officeDocument/2006/relationships">
   <p:cSld>
     <p:bg>
